--- a/.lessons/21 Fundamental CRUD/16 Paginating Eloquent Results/1.pptx
+++ b/.lessons/21 Fundamental CRUD/16 Paginating Eloquent Results/1.pptx
@@ -9,6 +9,13 @@
     <p:sldId id="402" r:id="rId3"/>
     <p:sldId id="403" r:id="rId4"/>
     <p:sldId id="400" r:id="rId5"/>
+    <p:sldId id="404" r:id="rId6"/>
+    <p:sldId id="405" r:id="rId7"/>
+    <p:sldId id="407" r:id="rId8"/>
+    <p:sldId id="408" r:id="rId9"/>
+    <p:sldId id="409" r:id="rId10"/>
+    <p:sldId id="410" r:id="rId11"/>
+    <p:sldId id="406" r:id="rId12"/>
   </p:sldIdLst>
   <p:sldSz cx="12192000" cy="6858000"/>
   <p:notesSz cx="6858000" cy="9144000"/>
@@ -262,7 +269,7 @@
           <a:p>
             <a:fld id="{3E102D2E-813C-461C-9963-687A650C48C0}" type="datetimeFigureOut">
               <a:rPr lang="en-US" smtClean="0"/>
-              <a:t>4/26/2025</a:t>
+              <a:t>5/22/2025</a:t>
             </a:fld>
             <a:endParaRPr lang="en-US"/>
           </a:p>
@@ -460,7 +467,7 @@
           <a:p>
             <a:fld id="{3E102D2E-813C-461C-9963-687A650C48C0}" type="datetimeFigureOut">
               <a:rPr lang="en-US" smtClean="0"/>
-              <a:t>4/26/2025</a:t>
+              <a:t>5/22/2025</a:t>
             </a:fld>
             <a:endParaRPr lang="en-US"/>
           </a:p>
@@ -668,7 +675,7 @@
           <a:p>
             <a:fld id="{3E102D2E-813C-461C-9963-687A650C48C0}" type="datetimeFigureOut">
               <a:rPr lang="en-US" smtClean="0"/>
-              <a:t>4/26/2025</a:t>
+              <a:t>5/22/2025</a:t>
             </a:fld>
             <a:endParaRPr lang="en-US"/>
           </a:p>
@@ -866,7 +873,7 @@
           <a:p>
             <a:fld id="{3E102D2E-813C-461C-9963-687A650C48C0}" type="datetimeFigureOut">
               <a:rPr lang="en-US" smtClean="0"/>
-              <a:t>4/26/2025</a:t>
+              <a:t>5/22/2025</a:t>
             </a:fld>
             <a:endParaRPr lang="en-US"/>
           </a:p>
@@ -1141,7 +1148,7 @@
           <a:p>
             <a:fld id="{3E102D2E-813C-461C-9963-687A650C48C0}" type="datetimeFigureOut">
               <a:rPr lang="en-US" smtClean="0"/>
-              <a:t>4/26/2025</a:t>
+              <a:t>5/22/2025</a:t>
             </a:fld>
             <a:endParaRPr lang="en-US"/>
           </a:p>
@@ -1406,7 +1413,7 @@
           <a:p>
             <a:fld id="{3E102D2E-813C-461C-9963-687A650C48C0}" type="datetimeFigureOut">
               <a:rPr lang="en-US" smtClean="0"/>
-              <a:t>4/26/2025</a:t>
+              <a:t>5/22/2025</a:t>
             </a:fld>
             <a:endParaRPr lang="en-US"/>
           </a:p>
@@ -1818,7 +1825,7 @@
           <a:p>
             <a:fld id="{3E102D2E-813C-461C-9963-687A650C48C0}" type="datetimeFigureOut">
               <a:rPr lang="en-US" smtClean="0"/>
-              <a:t>4/26/2025</a:t>
+              <a:t>5/22/2025</a:t>
             </a:fld>
             <a:endParaRPr lang="en-US"/>
           </a:p>
@@ -1959,7 +1966,7 @@
           <a:p>
             <a:fld id="{3E102D2E-813C-461C-9963-687A650C48C0}" type="datetimeFigureOut">
               <a:rPr lang="en-US" smtClean="0"/>
-              <a:t>4/26/2025</a:t>
+              <a:t>5/22/2025</a:t>
             </a:fld>
             <a:endParaRPr lang="en-US"/>
           </a:p>
@@ -2072,7 +2079,7 @@
           <a:p>
             <a:fld id="{3E102D2E-813C-461C-9963-687A650C48C0}" type="datetimeFigureOut">
               <a:rPr lang="en-US" smtClean="0"/>
-              <a:t>4/26/2025</a:t>
+              <a:t>5/22/2025</a:t>
             </a:fld>
             <a:endParaRPr lang="en-US"/>
           </a:p>
@@ -2383,7 +2390,7 @@
           <a:p>
             <a:fld id="{3E102D2E-813C-461C-9963-687A650C48C0}" type="datetimeFigureOut">
               <a:rPr lang="en-US" smtClean="0"/>
-              <a:t>4/26/2025</a:t>
+              <a:t>5/22/2025</a:t>
             </a:fld>
             <a:endParaRPr lang="en-US"/>
           </a:p>
@@ -2671,7 +2678,7 @@
           <a:p>
             <a:fld id="{3E102D2E-813C-461C-9963-687A650C48C0}" type="datetimeFigureOut">
               <a:rPr lang="en-US" smtClean="0"/>
-              <a:t>4/26/2025</a:t>
+              <a:t>5/22/2025</a:t>
             </a:fld>
             <a:endParaRPr lang="en-US"/>
           </a:p>
@@ -2912,7 +2919,7 @@
           <a:p>
             <a:fld id="{3E102D2E-813C-461C-9963-687A650C48C0}" type="datetimeFigureOut">
               <a:rPr lang="en-US" smtClean="0"/>
-              <a:t>4/26/2025</a:t>
+              <a:t>5/22/2025</a:t>
             </a:fld>
             <a:endParaRPr lang="en-US"/>
           </a:p>
@@ -3335,12 +3342,188 @@
           <a:chExt cx="0" cy="0"/>
         </a:xfrm>
       </p:grpSpPr>
+      <p:pic>
+        <p:nvPicPr>
+          <p:cNvPr id="6" name="Picture 5">
+            <a:extLst>
+              <a:ext uri="{FF2B5EF4-FFF2-40B4-BE49-F238E27FC236}">
+                <a16:creationId xmlns:a16="http://schemas.microsoft.com/office/drawing/2014/main" id="{983D7C59-081E-EB20-DA83-FDAA610A6725}"/>
+              </a:ext>
+            </a:extLst>
+          </p:cNvPr>
+          <p:cNvPicPr>
+            <a:picLocks noChangeAspect="1"/>
+          </p:cNvPicPr>
+          <p:nvPr/>
+        </p:nvPicPr>
+        <p:blipFill>
+          <a:blip r:embed="rId2"/>
+          <a:stretch>
+            <a:fillRect/>
+          </a:stretch>
+        </p:blipFill>
+        <p:spPr>
+          <a:xfrm>
+            <a:off x="2673798" y="1819373"/>
+            <a:ext cx="9518202" cy="5038627"/>
+          </a:xfrm>
+          <a:prstGeom prst="rect">
+            <a:avLst/>
+          </a:prstGeom>
+        </p:spPr>
+      </p:pic>
+      <p:sp>
+        <p:nvSpPr>
+          <p:cNvPr id="7" name="TextBox 6">
+            <a:extLst>
+              <a:ext uri="{FF2B5EF4-FFF2-40B4-BE49-F238E27FC236}">
+                <a16:creationId xmlns:a16="http://schemas.microsoft.com/office/drawing/2014/main" id="{980FAC85-819D-3CEB-7725-511061E005DC}"/>
+              </a:ext>
+            </a:extLst>
+          </p:cNvPr>
+          <p:cNvSpPr txBox="1"/>
+          <p:nvPr/>
+        </p:nvSpPr>
+        <p:spPr>
+          <a:xfrm>
+            <a:off x="217714" y="255046"/>
+            <a:ext cx="11756571" cy="955518"/>
+          </a:xfrm>
+          <a:prstGeom prst="rect">
+            <a:avLst/>
+          </a:prstGeom>
+          <a:noFill/>
+        </p:spPr>
+        <p:txBody>
+          <a:bodyPr wrap="square">
+            <a:spAutoFit/>
+          </a:bodyPr>
+          <a:lstStyle/>
+          <a:p>
+            <a:pPr>
+              <a:lnSpc>
+                <a:spcPct val="150000"/>
+              </a:lnSpc>
+              <a:buNone/>
+            </a:pPr>
+            <a:r>
+              <a:rPr kumimoji="0" lang="az-Latn-AZ" altLang="en-US" sz="1300" b="0" i="0" u="none" strike="noStrike" cap="none" normalizeH="0" baseline="0">
+                <a:ln>
+                  <a:noFill/>
+                </a:ln>
+                <a:solidFill>
+                  <a:schemeClr val="tx1"/>
+                </a:solidFill>
+                <a:effectLst/>
+                <a:latin typeface="Arial" panose="020B0604020202020204" pitchFamily="34" charset="0"/>
+              </a:rPr>
+              <a:t>Gələn və </a:t>
+            </a:r>
+            <a:r>
+              <a:rPr lang="az-Latn-AZ" altLang="en-US" sz="1300">
+                <a:latin typeface="Arial" panose="020B0604020202020204" pitchFamily="34" charset="0"/>
+              </a:rPr>
+              <a:t>gedən sorğuları görmək üçün </a:t>
+            </a:r>
+            <a:r>
+              <a:rPr lang="az-Latn-AZ" altLang="en-US" sz="1300" b="1">
+                <a:latin typeface="Arial" panose="020B0604020202020204" pitchFamily="34" charset="0"/>
+              </a:rPr>
+              <a:t>DebugBar</a:t>
+            </a:r>
+            <a:r>
+              <a:rPr lang="az-Latn-AZ" altLang="en-US" sz="1300">
+                <a:latin typeface="Arial" panose="020B0604020202020204" pitchFamily="34" charset="0"/>
+              </a:rPr>
+              <a:t> yükləyə bilərsiz. </a:t>
+            </a:r>
+          </a:p>
+          <a:p>
+            <a:pPr>
+              <a:lnSpc>
+                <a:spcPct val="150000"/>
+              </a:lnSpc>
+              <a:buNone/>
+            </a:pPr>
+            <a:endParaRPr kumimoji="0" lang="az-Latn-AZ" altLang="en-US" sz="1300" b="0" i="0" u="none" strike="noStrike" cap="none" normalizeH="0" baseline="0">
+              <a:ln>
+                <a:noFill/>
+              </a:ln>
+              <a:solidFill>
+                <a:schemeClr val="tx1"/>
+              </a:solidFill>
+              <a:effectLst/>
+              <a:latin typeface="Arial" panose="020B0604020202020204" pitchFamily="34" charset="0"/>
+            </a:endParaRPr>
+          </a:p>
+          <a:p>
+            <a:pPr>
+              <a:lnSpc>
+                <a:spcPct val="150000"/>
+              </a:lnSpc>
+              <a:buNone/>
+            </a:pPr>
+            <a:r>
+              <a:rPr lang="az-Latn-AZ" altLang="en-US" sz="1300">
+                <a:latin typeface="Arial" panose="020B0604020202020204" pitchFamily="34" charset="0"/>
+              </a:rPr>
+              <a:t>Əvvəlki dərslərdə etmişdik bunu. Bu indiki dərsdə proyekti silib yenidən qurduğumuz üçün Debubar da silinmişdi. Onun üçün təkrar yükləyirik.</a:t>
+            </a:r>
+            <a:endParaRPr kumimoji="0" lang="en-US" altLang="en-US" sz="1300" b="0" i="0" u="none" strike="noStrike" cap="none" normalizeH="0" baseline="0">
+              <a:ln>
+                <a:noFill/>
+              </a:ln>
+              <a:solidFill>
+                <a:schemeClr val="tx1"/>
+              </a:solidFill>
+              <a:effectLst/>
+              <a:latin typeface="Arial" panose="020B0604020202020204" pitchFamily="34" charset="0"/>
+            </a:endParaRPr>
+          </a:p>
+        </p:txBody>
+      </p:sp>
+    </p:spTree>
+    <p:extLst>
+      <p:ext uri="{BB962C8B-B14F-4D97-AF65-F5344CB8AC3E}">
+        <p14:creationId xmlns:p14="http://schemas.microsoft.com/office/powerpoint/2010/main" val="4240944397"/>
+      </p:ext>
+    </p:extLst>
+  </p:cSld>
+  <p:clrMapOvr>
+    <a:masterClrMapping/>
+  </p:clrMapOvr>
+</p:sld>
+</file>
+
+<file path=ppt/slides/slide10.xml><?xml version="1.0" encoding="utf-8"?>
+<p:sld xmlns:a="http://schemas.openxmlformats.org/drawingml/2006/main" xmlns:r="http://schemas.openxmlformats.org/officeDocument/2006/relationships" xmlns:p="http://schemas.openxmlformats.org/presentationml/2006/main">
+  <p:cSld>
+    <p:spTree>
+      <p:nvGrpSpPr>
+        <p:cNvPr id="1" name="">
+          <a:extLst>
+            <a:ext uri="{FF2B5EF4-FFF2-40B4-BE49-F238E27FC236}">
+              <a16:creationId xmlns:a16="http://schemas.microsoft.com/office/drawing/2014/main" id="{5216F28F-8EF1-C25A-7989-D5665939B329}"/>
+            </a:ext>
+          </a:extLst>
+        </p:cNvPr>
+        <p:cNvGrpSpPr/>
+        <p:nvPr/>
+      </p:nvGrpSpPr>
+      <p:grpSpPr>
+        <a:xfrm>
+          <a:off x="0" y="0"/>
+          <a:ext cx="0" cy="0"/>
+          <a:chOff x="0" y="0"/>
+          <a:chExt cx="0" cy="0"/>
+        </a:xfrm>
+      </p:grpSpPr>
       <p:sp>
         <p:nvSpPr>
           <p:cNvPr id="3" name="TextBox 2">
             <a:extLst>
               <a:ext uri="{FF2B5EF4-FFF2-40B4-BE49-F238E27FC236}">
-                <a16:creationId xmlns:a16="http://schemas.microsoft.com/office/drawing/2014/main" id="{B9B7921F-1407-B2A4-3C32-A383E2851470}"/>
+                <a16:creationId xmlns:a16="http://schemas.microsoft.com/office/drawing/2014/main" id="{04BC0136-5659-C443-FE22-93702D3F6997}"/>
               </a:ext>
             </a:extLst>
           </p:cNvPr>
@@ -3388,7 +3571,93 @@
     </p:spTree>
     <p:extLst>
       <p:ext uri="{BB962C8B-B14F-4D97-AF65-F5344CB8AC3E}">
-        <p14:creationId xmlns:p14="http://schemas.microsoft.com/office/powerpoint/2010/main" val="4240944397"/>
+        <p14:creationId xmlns:p14="http://schemas.microsoft.com/office/powerpoint/2010/main" val="2657643014"/>
+      </p:ext>
+    </p:extLst>
+  </p:cSld>
+  <p:clrMapOvr>
+    <a:masterClrMapping/>
+  </p:clrMapOvr>
+</p:sld>
+</file>
+
+<file path=ppt/slides/slide11.xml><?xml version="1.0" encoding="utf-8"?>
+<p:sld xmlns:a="http://schemas.openxmlformats.org/drawingml/2006/main" xmlns:r="http://schemas.openxmlformats.org/officeDocument/2006/relationships" xmlns:p="http://schemas.openxmlformats.org/presentationml/2006/main">
+  <p:cSld>
+    <p:spTree>
+      <p:nvGrpSpPr>
+        <p:cNvPr id="1" name="">
+          <a:extLst>
+            <a:ext uri="{FF2B5EF4-FFF2-40B4-BE49-F238E27FC236}">
+              <a16:creationId xmlns:a16="http://schemas.microsoft.com/office/drawing/2014/main" id="{179665EA-EF1B-9E48-498A-6CE7CBC8093C}"/>
+            </a:ext>
+          </a:extLst>
+        </p:cNvPr>
+        <p:cNvGrpSpPr/>
+        <p:nvPr/>
+      </p:nvGrpSpPr>
+      <p:grpSpPr>
+        <a:xfrm>
+          <a:off x="0" y="0"/>
+          <a:ext cx="0" cy="0"/>
+          <a:chOff x="0" y="0"/>
+          <a:chExt cx="0" cy="0"/>
+        </a:xfrm>
+      </p:grpSpPr>
+      <p:sp>
+        <p:nvSpPr>
+          <p:cNvPr id="3" name="TextBox 2">
+            <a:extLst>
+              <a:ext uri="{FF2B5EF4-FFF2-40B4-BE49-F238E27FC236}">
+                <a16:creationId xmlns:a16="http://schemas.microsoft.com/office/drawing/2014/main" id="{BCC4F6B1-8FA8-9652-F084-B640097CBC34}"/>
+              </a:ext>
+            </a:extLst>
+          </p:cNvPr>
+          <p:cNvSpPr txBox="1"/>
+          <p:nvPr/>
+        </p:nvSpPr>
+        <p:spPr>
+          <a:xfrm>
+            <a:off x="217714" y="255046"/>
+            <a:ext cx="11756571" cy="355354"/>
+          </a:xfrm>
+          <a:prstGeom prst="rect">
+            <a:avLst/>
+          </a:prstGeom>
+          <a:noFill/>
+        </p:spPr>
+        <p:txBody>
+          <a:bodyPr wrap="square">
+            <a:spAutoFit/>
+          </a:bodyPr>
+          <a:lstStyle/>
+          <a:p>
+            <a:pPr>
+              <a:lnSpc>
+                <a:spcPct val="150000"/>
+              </a:lnSpc>
+              <a:buNone/>
+            </a:pPr>
+            <a:r>
+              <a:rPr kumimoji="0" lang="en-US" altLang="en-US" sz="1300" b="0" i="0" u="none" strike="noStrike" cap="none" normalizeH="0" baseline="0">
+                <a:ln>
+                  <a:noFill/>
+                </a:ln>
+                <a:solidFill>
+                  <a:schemeClr val="tx1"/>
+                </a:solidFill>
+                <a:effectLst/>
+                <a:latin typeface="Arial" panose="020B0604020202020204" pitchFamily="34" charset="0"/>
+              </a:rPr>
+              <a:t>.</a:t>
+            </a:r>
+          </a:p>
+        </p:txBody>
+      </p:sp>
+    </p:spTree>
+    <p:extLst>
+      <p:ext uri="{BB962C8B-B14F-4D97-AF65-F5344CB8AC3E}">
+        <p14:creationId xmlns:p14="http://schemas.microsoft.com/office/powerpoint/2010/main" val="2841238009"/>
       </p:ext>
     </p:extLst>
   </p:cSld>
@@ -3456,21 +3725,84 @@
               <a:buNone/>
             </a:pPr>
             <a:r>
-              <a:rPr kumimoji="0" lang="en-US" altLang="en-US" sz="1300" b="0" i="0" u="none" strike="noStrike" cap="none" normalizeH="0" baseline="0">
-                <a:ln>
-                  <a:noFill/>
-                </a:ln>
-                <a:solidFill>
-                  <a:schemeClr val="tx1"/>
-                </a:solidFill>
-                <a:effectLst/>
-                <a:latin typeface="Arial" panose="020B0604020202020204" pitchFamily="34" charset="0"/>
-              </a:rPr>
-              <a:t>.</a:t>
-            </a:r>
-          </a:p>
-        </p:txBody>
-      </p:sp>
+              <a:rPr lang="az-Latn-AZ" altLang="en-US" sz="1300" b="1">
+                <a:latin typeface="Arial" panose="020B0604020202020204" pitchFamily="34" charset="0"/>
+              </a:rPr>
+              <a:t>index.blade.php </a:t>
+            </a:r>
+            <a:r>
+              <a:rPr lang="az-Latn-AZ" altLang="en-US" sz="1300">
+                <a:latin typeface="Arial" panose="020B0604020202020204" pitchFamily="34" charset="0"/>
+              </a:rPr>
+              <a:t>faylında </a:t>
+            </a:r>
+            <a:r>
+              <a:rPr lang="az-Latn-AZ" altLang="en-US" sz="1300" b="1">
+                <a:latin typeface="Arial" panose="020B0604020202020204" pitchFamily="34" charset="0"/>
+              </a:rPr>
+              <a:t>posts</a:t>
+            </a:r>
+            <a:r>
+              <a:rPr lang="az-Latn-AZ" altLang="en-US" sz="1300">
+                <a:latin typeface="Arial" panose="020B0604020202020204" pitchFamily="34" charset="0"/>
+              </a:rPr>
+              <a:t> cədvəli ilə gələn 4 dənə əlavə </a:t>
+            </a:r>
+            <a:r>
+              <a:rPr lang="az-Latn-AZ" altLang="en-US" sz="1300" b="1">
+                <a:latin typeface="Arial" panose="020B0604020202020204" pitchFamily="34" charset="0"/>
+              </a:rPr>
+              <a:t>category</a:t>
+            </a:r>
+            <a:r>
+              <a:rPr lang="az-Latn-AZ" altLang="en-US" sz="1300">
+                <a:latin typeface="Arial" panose="020B0604020202020204" pitchFamily="34" charset="0"/>
+              </a:rPr>
+              <a:t> sorğusu görürük.</a:t>
+            </a:r>
+            <a:endParaRPr kumimoji="0" lang="en-US" altLang="en-US" sz="1300" b="0" i="0" u="none" strike="noStrike" cap="none" normalizeH="0" baseline="0">
+              <a:ln>
+                <a:noFill/>
+              </a:ln>
+              <a:solidFill>
+                <a:schemeClr val="tx1"/>
+              </a:solidFill>
+              <a:effectLst/>
+              <a:latin typeface="Arial" panose="020B0604020202020204" pitchFamily="34" charset="0"/>
+            </a:endParaRPr>
+          </a:p>
+        </p:txBody>
+      </p:sp>
+      <p:pic>
+        <p:nvPicPr>
+          <p:cNvPr id="4" name="Picture 3">
+            <a:extLst>
+              <a:ext uri="{FF2B5EF4-FFF2-40B4-BE49-F238E27FC236}">
+                <a16:creationId xmlns:a16="http://schemas.microsoft.com/office/drawing/2014/main" id="{9C01E2BA-E544-A0A7-D135-ECBB0D43B2CF}"/>
+              </a:ext>
+            </a:extLst>
+          </p:cNvPr>
+          <p:cNvPicPr>
+            <a:picLocks noChangeAspect="1"/>
+          </p:cNvPicPr>
+          <p:nvPr/>
+        </p:nvPicPr>
+        <p:blipFill>
+          <a:blip r:embed="rId2"/>
+          <a:stretch>
+            <a:fillRect/>
+          </a:stretch>
+        </p:blipFill>
+        <p:spPr>
+          <a:xfrm>
+            <a:off x="-1" y="1311561"/>
+            <a:ext cx="12192000" cy="5546439"/>
+          </a:xfrm>
+          <a:prstGeom prst="rect">
+            <a:avLst/>
+          </a:prstGeom>
+        </p:spPr>
+      </p:pic>
     </p:spTree>
     <p:extLst>
       <p:ext uri="{BB962C8B-B14F-4D97-AF65-F5344CB8AC3E}">
@@ -3522,7 +3854,7 @@
         <p:spPr>
           <a:xfrm>
             <a:off x="217714" y="255046"/>
-            <a:ext cx="11756571" cy="355354"/>
+            <a:ext cx="11756571" cy="1255600"/>
           </a:xfrm>
           <a:prstGeom prst="rect">
             <a:avLst/>
@@ -3542,21 +3874,101 @@
               <a:buNone/>
             </a:pPr>
             <a:r>
-              <a:rPr kumimoji="0" lang="en-US" altLang="en-US" sz="1300" b="0" i="0" u="none" strike="noStrike" cap="none" normalizeH="0" baseline="0">
-                <a:ln>
-                  <a:noFill/>
-                </a:ln>
-                <a:solidFill>
-                  <a:schemeClr val="tx1"/>
-                </a:solidFill>
-                <a:effectLst/>
-                <a:latin typeface="Arial" panose="020B0604020202020204" pitchFamily="34" charset="0"/>
-              </a:rPr>
-              <a:t>.</a:t>
-            </a:r>
-          </a:p>
-        </p:txBody>
-      </p:sp>
+              <a:rPr lang="az-Latn-AZ" altLang="en-US" sz="1300">
+                <a:latin typeface="Arial" panose="020B0604020202020204" pitchFamily="34" charset="0"/>
+              </a:rPr>
+              <a:t>Bunun səbəbi, sorğunu sağ şəkildəki kimi çağırmaqdır.</a:t>
+            </a:r>
+          </a:p>
+          <a:p>
+            <a:pPr>
+              <a:lnSpc>
+                <a:spcPct val="150000"/>
+              </a:lnSpc>
+              <a:buNone/>
+            </a:pPr>
+            <a:endParaRPr lang="az-Latn-AZ" altLang="en-US" sz="1300">
+              <a:latin typeface="Arial" panose="020B0604020202020204" pitchFamily="34" charset="0"/>
+            </a:endParaRPr>
+          </a:p>
+          <a:p>
+            <a:pPr>
+              <a:lnSpc>
+                <a:spcPct val="150000"/>
+              </a:lnSpc>
+              <a:buNone/>
+            </a:pPr>
+            <a:r>
+              <a:rPr lang="az-Latn-AZ" altLang="en-US" sz="1300">
+                <a:latin typeface="Arial" panose="020B0604020202020204" pitchFamily="34" charset="0"/>
+              </a:rPr>
+              <a:t>Əgər sorğunu azaltmaq istəyiriksə onda </a:t>
+            </a:r>
+            <a:r>
+              <a:rPr lang="en-US" altLang="en-US" sz="1300" b="1">
+                <a:latin typeface="Arial" panose="020B0604020202020204" pitchFamily="34" charset="0"/>
+              </a:rPr>
+              <a:t>with() </a:t>
+            </a:r>
+            <a:r>
+              <a:rPr lang="en-US" altLang="en-US" sz="1300">
+                <a:latin typeface="Arial" panose="020B0604020202020204" pitchFamily="34" charset="0"/>
+              </a:rPr>
+              <a:t>metodundan </a:t>
+            </a:r>
+            <a:r>
+              <a:rPr lang="az-Latn-AZ" altLang="en-US" sz="1300">
+                <a:latin typeface="Arial" panose="020B0604020202020204" pitchFamily="34" charset="0"/>
+              </a:rPr>
+              <a:t>istifadə etmək lazımdır.</a:t>
+            </a:r>
+          </a:p>
+          <a:p>
+            <a:pPr>
+              <a:lnSpc>
+                <a:spcPct val="150000"/>
+              </a:lnSpc>
+              <a:buNone/>
+            </a:pPr>
+            <a:r>
+              <a:rPr lang="az-Latn-AZ" altLang="en-US" sz="1300">
+                <a:latin typeface="Arial" panose="020B0604020202020204" pitchFamily="34" charset="0"/>
+              </a:rPr>
+              <a:t>Növbəti slayd....</a:t>
+            </a:r>
+          </a:p>
+        </p:txBody>
+      </p:sp>
+      <p:pic>
+        <p:nvPicPr>
+          <p:cNvPr id="4" name="Picture 3">
+            <a:extLst>
+              <a:ext uri="{FF2B5EF4-FFF2-40B4-BE49-F238E27FC236}">
+                <a16:creationId xmlns:a16="http://schemas.microsoft.com/office/drawing/2014/main" id="{2D6A3FBC-763A-BF8D-C460-776B932318EA}"/>
+              </a:ext>
+            </a:extLst>
+          </p:cNvPr>
+          <p:cNvPicPr>
+            <a:picLocks noChangeAspect="1"/>
+          </p:cNvPicPr>
+          <p:nvPr/>
+        </p:nvPicPr>
+        <p:blipFill>
+          <a:blip r:embed="rId2"/>
+          <a:stretch>
+            <a:fillRect/>
+          </a:stretch>
+        </p:blipFill>
+        <p:spPr>
+          <a:xfrm>
+            <a:off x="7782108" y="0"/>
+            <a:ext cx="4409892" cy="6858000"/>
+          </a:xfrm>
+          <a:prstGeom prst="rect">
+            <a:avLst/>
+          </a:prstGeom>
+        </p:spPr>
+      </p:pic>
     </p:spTree>
     <p:extLst>
       <p:ext uri="{BB962C8B-B14F-4D97-AF65-F5344CB8AC3E}">
@@ -3628,6 +4040,588 @@
               <a:buNone/>
             </a:pPr>
             <a:r>
+              <a:rPr lang="az-Latn-AZ" altLang="en-US" sz="1300">
+                <a:latin typeface="Arial" panose="020B0604020202020204" pitchFamily="34" charset="0"/>
+              </a:rPr>
+              <a:t>Nəticədə sadəcə 2 sorğu görəcəyik.</a:t>
+            </a:r>
+            <a:endParaRPr kumimoji="0" lang="en-US" altLang="en-US" sz="1300" b="0" i="0" u="none" strike="noStrike" cap="none" normalizeH="0" baseline="0">
+              <a:ln>
+                <a:noFill/>
+              </a:ln>
+              <a:solidFill>
+                <a:schemeClr val="tx1"/>
+              </a:solidFill>
+              <a:effectLst/>
+              <a:latin typeface="Arial" panose="020B0604020202020204" pitchFamily="34" charset="0"/>
+            </a:endParaRPr>
+          </a:p>
+        </p:txBody>
+      </p:sp>
+      <p:pic>
+        <p:nvPicPr>
+          <p:cNvPr id="4" name="Picture 3">
+            <a:extLst>
+              <a:ext uri="{FF2B5EF4-FFF2-40B4-BE49-F238E27FC236}">
+                <a16:creationId xmlns:a16="http://schemas.microsoft.com/office/drawing/2014/main" id="{62B4E066-F0AE-5811-9A11-18343CFBE717}"/>
+              </a:ext>
+            </a:extLst>
+          </p:cNvPr>
+          <p:cNvPicPr>
+            <a:picLocks noChangeAspect="1"/>
+          </p:cNvPicPr>
+          <p:nvPr/>
+        </p:nvPicPr>
+        <p:blipFill>
+          <a:blip r:embed="rId2"/>
+          <a:stretch>
+            <a:fillRect/>
+          </a:stretch>
+        </p:blipFill>
+        <p:spPr>
+          <a:xfrm>
+            <a:off x="7925502" y="0"/>
+            <a:ext cx="4266498" cy="6858000"/>
+          </a:xfrm>
+          <a:prstGeom prst="rect">
+            <a:avLst/>
+          </a:prstGeom>
+        </p:spPr>
+      </p:pic>
+      <p:pic>
+        <p:nvPicPr>
+          <p:cNvPr id="6" name="Picture 5">
+            <a:extLst>
+              <a:ext uri="{FF2B5EF4-FFF2-40B4-BE49-F238E27FC236}">
+                <a16:creationId xmlns:a16="http://schemas.microsoft.com/office/drawing/2014/main" id="{3B9A8E9D-0BFB-8722-2494-BDFC359E1983}"/>
+              </a:ext>
+            </a:extLst>
+          </p:cNvPr>
+          <p:cNvPicPr>
+            <a:picLocks noChangeAspect="1"/>
+          </p:cNvPicPr>
+          <p:nvPr/>
+        </p:nvPicPr>
+        <p:blipFill>
+          <a:blip r:embed="rId3"/>
+          <a:stretch>
+            <a:fillRect/>
+          </a:stretch>
+        </p:blipFill>
+        <p:spPr>
+          <a:xfrm>
+            <a:off x="0" y="2360644"/>
+            <a:ext cx="7069082" cy="4497355"/>
+          </a:xfrm>
+          <a:prstGeom prst="rect">
+            <a:avLst/>
+          </a:prstGeom>
+        </p:spPr>
+      </p:pic>
+    </p:spTree>
+    <p:extLst>
+      <p:ext uri="{BB962C8B-B14F-4D97-AF65-F5344CB8AC3E}">
+        <p14:creationId xmlns:p14="http://schemas.microsoft.com/office/powerpoint/2010/main" val="3095838342"/>
+      </p:ext>
+    </p:extLst>
+  </p:cSld>
+  <p:clrMapOvr>
+    <a:masterClrMapping/>
+  </p:clrMapOvr>
+</p:sld>
+</file>
+
+<file path=ppt/slides/slide5.xml><?xml version="1.0" encoding="utf-8"?>
+<p:sld xmlns:a="http://schemas.openxmlformats.org/drawingml/2006/main" xmlns:r="http://schemas.openxmlformats.org/officeDocument/2006/relationships" xmlns:p="http://schemas.openxmlformats.org/presentationml/2006/main">
+  <p:cSld>
+    <p:spTree>
+      <p:nvGrpSpPr>
+        <p:cNvPr id="1" name="">
+          <a:extLst>
+            <a:ext uri="{FF2B5EF4-FFF2-40B4-BE49-F238E27FC236}">
+              <a16:creationId xmlns:a16="http://schemas.microsoft.com/office/drawing/2014/main" id="{7BEF4B4A-8D9B-EE25-C003-4856A850C511}"/>
+            </a:ext>
+          </a:extLst>
+        </p:cNvPr>
+        <p:cNvGrpSpPr/>
+        <p:nvPr/>
+      </p:nvGrpSpPr>
+      <p:grpSpPr>
+        <a:xfrm>
+          <a:off x="0" y="0"/>
+          <a:ext cx="0" cy="0"/>
+          <a:chOff x="0" y="0"/>
+          <a:chExt cx="0" cy="0"/>
+        </a:xfrm>
+      </p:grpSpPr>
+      <p:sp>
+        <p:nvSpPr>
+          <p:cNvPr id="3" name="TextBox 2">
+            <a:extLst>
+              <a:ext uri="{FF2B5EF4-FFF2-40B4-BE49-F238E27FC236}">
+                <a16:creationId xmlns:a16="http://schemas.microsoft.com/office/drawing/2014/main" id="{C7C344B1-C667-8C61-95D9-64C5E4F09385}"/>
+              </a:ext>
+            </a:extLst>
+          </p:cNvPr>
+          <p:cNvSpPr txBox="1"/>
+          <p:nvPr/>
+        </p:nvSpPr>
+        <p:spPr>
+          <a:xfrm>
+            <a:off x="217714" y="255046"/>
+            <a:ext cx="11756571" cy="2455929"/>
+          </a:xfrm>
+          <a:prstGeom prst="rect">
+            <a:avLst/>
+          </a:prstGeom>
+          <a:noFill/>
+        </p:spPr>
+        <p:txBody>
+          <a:bodyPr wrap="square">
+            <a:spAutoFit/>
+          </a:bodyPr>
+          <a:lstStyle/>
+          <a:p>
+            <a:pPr>
+              <a:lnSpc>
+                <a:spcPct val="150000"/>
+              </a:lnSpc>
+              <a:buNone/>
+            </a:pPr>
+            <a:r>
+              <a:rPr lang="az-Latn-AZ" altLang="en-US" sz="1300">
+                <a:latin typeface="Arial" panose="020B0604020202020204" pitchFamily="34" charset="0"/>
+              </a:rPr>
+              <a:t>İndi </a:t>
+            </a:r>
+            <a:r>
+              <a:rPr lang="az-Latn-AZ" altLang="en-US" sz="1300" b="1">
+                <a:latin typeface="Arial" panose="020B0604020202020204" pitchFamily="34" charset="0"/>
+              </a:rPr>
+              <a:t>11</a:t>
+            </a:r>
+            <a:r>
+              <a:rPr lang="az-Latn-AZ" altLang="en-US" sz="1300">
+                <a:latin typeface="Arial" panose="020B0604020202020204" pitchFamily="34" charset="0"/>
+              </a:rPr>
+              <a:t> dənə data əlavə edirik cədvələ.</a:t>
+            </a:r>
+          </a:p>
+          <a:p>
+            <a:pPr>
+              <a:lnSpc>
+                <a:spcPct val="150000"/>
+              </a:lnSpc>
+              <a:buNone/>
+            </a:pPr>
+            <a:endParaRPr kumimoji="0" lang="az-Latn-AZ" altLang="en-US" sz="1300" b="0" i="0" u="none" strike="noStrike" cap="none" normalizeH="0" baseline="0">
+              <a:ln>
+                <a:noFill/>
+              </a:ln>
+              <a:solidFill>
+                <a:schemeClr val="tx1"/>
+              </a:solidFill>
+              <a:effectLst/>
+              <a:latin typeface="Arial" panose="020B0604020202020204" pitchFamily="34" charset="0"/>
+            </a:endParaRPr>
+          </a:p>
+          <a:p>
+            <a:pPr>
+              <a:lnSpc>
+                <a:spcPct val="150000"/>
+              </a:lnSpc>
+              <a:buNone/>
+            </a:pPr>
+            <a:r>
+              <a:rPr lang="az-Latn-AZ" altLang="en-US" sz="1300">
+                <a:latin typeface="Arial" panose="020B0604020202020204" pitchFamily="34" charset="0"/>
+              </a:rPr>
+              <a:t>Data əlavə edildikcə səhifə uzanır.  Səhifənin uzanmaması üçün</a:t>
+            </a:r>
+          </a:p>
+          <a:p>
+            <a:pPr>
+              <a:lnSpc>
+                <a:spcPct val="150000"/>
+              </a:lnSpc>
+              <a:buNone/>
+            </a:pPr>
+            <a:r>
+              <a:rPr lang="az-Latn-AZ" altLang="en-US" sz="1300" b="1">
+                <a:latin typeface="Arial" panose="020B0604020202020204" pitchFamily="34" charset="0"/>
+              </a:rPr>
+              <a:t>paginator</a:t>
+            </a:r>
+            <a:r>
+              <a:rPr lang="az-Latn-AZ" altLang="en-US" sz="1300">
+                <a:latin typeface="Arial" panose="020B0604020202020204" pitchFamily="34" charset="0"/>
+              </a:rPr>
+              <a:t> istifadə edə bilərik.</a:t>
+            </a:r>
+          </a:p>
+          <a:p>
+            <a:pPr>
+              <a:lnSpc>
+                <a:spcPct val="150000"/>
+              </a:lnSpc>
+              <a:buNone/>
+            </a:pPr>
+            <a:endParaRPr lang="az-Latn-AZ" altLang="en-US" sz="1300">
+              <a:latin typeface="Arial" panose="020B0604020202020204" pitchFamily="34" charset="0"/>
+            </a:endParaRPr>
+          </a:p>
+          <a:p>
+            <a:pPr>
+              <a:lnSpc>
+                <a:spcPct val="150000"/>
+              </a:lnSpc>
+              <a:buNone/>
+            </a:pPr>
+            <a:endParaRPr lang="az-Latn-AZ" altLang="en-US" sz="1300">
+              <a:latin typeface="Arial" panose="020B0604020202020204" pitchFamily="34" charset="0"/>
+            </a:endParaRPr>
+          </a:p>
+          <a:p>
+            <a:pPr>
+              <a:lnSpc>
+                <a:spcPct val="150000"/>
+              </a:lnSpc>
+              <a:buNone/>
+            </a:pPr>
+            <a:r>
+              <a:rPr lang="az-Latn-AZ" altLang="en-US" sz="1300">
+                <a:latin typeface="Arial" panose="020B0604020202020204" pitchFamily="34" charset="0"/>
+              </a:rPr>
+              <a:t>Bunun üçün isə dataları </a:t>
+            </a:r>
+            <a:r>
+              <a:rPr lang="az-Latn-AZ" altLang="en-US" sz="1300" b="1">
+                <a:latin typeface="Arial" panose="020B0604020202020204" pitchFamily="34" charset="0"/>
+              </a:rPr>
+              <a:t>get() </a:t>
+            </a:r>
+            <a:r>
+              <a:rPr lang="az-Latn-AZ" altLang="en-US" sz="1300">
+                <a:latin typeface="Arial" panose="020B0604020202020204" pitchFamily="34" charset="0"/>
+              </a:rPr>
+              <a:t>əvəzinə </a:t>
+            </a:r>
+            <a:r>
+              <a:rPr lang="az-Latn-AZ" altLang="en-US" sz="1300" b="1">
+                <a:solidFill>
+                  <a:srgbClr val="FF0000"/>
+                </a:solidFill>
+                <a:latin typeface="Arial" panose="020B0604020202020204" pitchFamily="34" charset="0"/>
+              </a:rPr>
+              <a:t>paginate() </a:t>
+            </a:r>
+            <a:r>
+              <a:rPr lang="az-Latn-AZ" altLang="en-US" sz="1300">
+                <a:latin typeface="Arial" panose="020B0604020202020204" pitchFamily="34" charset="0"/>
+              </a:rPr>
+              <a:t>funksiyası ilə</a:t>
+            </a:r>
+          </a:p>
+          <a:p>
+            <a:pPr>
+              <a:lnSpc>
+                <a:spcPct val="150000"/>
+              </a:lnSpc>
+              <a:buNone/>
+            </a:pPr>
+            <a:r>
+              <a:rPr lang="az-Latn-AZ" altLang="en-US" sz="1300">
+                <a:latin typeface="Arial" panose="020B0604020202020204" pitchFamily="34" charset="0"/>
+              </a:rPr>
+              <a:t>çağıra bilərik. Növbəti slayd.....</a:t>
+            </a:r>
+          </a:p>
+        </p:txBody>
+      </p:sp>
+      <p:pic>
+        <p:nvPicPr>
+          <p:cNvPr id="4" name="Picture 3">
+            <a:extLst>
+              <a:ext uri="{FF2B5EF4-FFF2-40B4-BE49-F238E27FC236}">
+                <a16:creationId xmlns:a16="http://schemas.microsoft.com/office/drawing/2014/main" id="{805A23DA-D199-623C-A758-64CA7B8BC604}"/>
+              </a:ext>
+            </a:extLst>
+          </p:cNvPr>
+          <p:cNvPicPr>
+            <a:picLocks noChangeAspect="1"/>
+          </p:cNvPicPr>
+          <p:nvPr/>
+        </p:nvPicPr>
+        <p:blipFill>
+          <a:blip r:embed="rId2"/>
+          <a:stretch>
+            <a:fillRect/>
+          </a:stretch>
+        </p:blipFill>
+        <p:spPr>
+          <a:xfrm>
+            <a:off x="5930348" y="0"/>
+            <a:ext cx="6261652" cy="6858000"/>
+          </a:xfrm>
+          <a:prstGeom prst="rect">
+            <a:avLst/>
+          </a:prstGeom>
+        </p:spPr>
+      </p:pic>
+    </p:spTree>
+    <p:extLst>
+      <p:ext uri="{BB962C8B-B14F-4D97-AF65-F5344CB8AC3E}">
+        <p14:creationId xmlns:p14="http://schemas.microsoft.com/office/powerpoint/2010/main" val="1563269145"/>
+      </p:ext>
+    </p:extLst>
+  </p:cSld>
+  <p:clrMapOvr>
+    <a:masterClrMapping/>
+  </p:clrMapOvr>
+</p:sld>
+</file>
+
+<file path=ppt/slides/slide6.xml><?xml version="1.0" encoding="utf-8"?>
+<p:sld xmlns:a="http://schemas.openxmlformats.org/drawingml/2006/main" xmlns:r="http://schemas.openxmlformats.org/officeDocument/2006/relationships" xmlns:p="http://schemas.openxmlformats.org/presentationml/2006/main">
+  <p:cSld>
+    <p:spTree>
+      <p:nvGrpSpPr>
+        <p:cNvPr id="1" name="">
+          <a:extLst>
+            <a:ext uri="{FF2B5EF4-FFF2-40B4-BE49-F238E27FC236}">
+              <a16:creationId xmlns:a16="http://schemas.microsoft.com/office/drawing/2014/main" id="{CC154BD9-C22D-6BC9-82F3-B6B590660304}"/>
+            </a:ext>
+          </a:extLst>
+        </p:cNvPr>
+        <p:cNvGrpSpPr/>
+        <p:nvPr/>
+      </p:nvGrpSpPr>
+      <p:grpSpPr>
+        <a:xfrm>
+          <a:off x="0" y="0"/>
+          <a:ext cx="0" cy="0"/>
+          <a:chOff x="0" y="0"/>
+          <a:chExt cx="0" cy="0"/>
+        </a:xfrm>
+      </p:grpSpPr>
+      <p:sp>
+        <p:nvSpPr>
+          <p:cNvPr id="3" name="TextBox 2">
+            <a:extLst>
+              <a:ext uri="{FF2B5EF4-FFF2-40B4-BE49-F238E27FC236}">
+                <a16:creationId xmlns:a16="http://schemas.microsoft.com/office/drawing/2014/main" id="{67948385-557B-D30B-75DD-94F4E00078CD}"/>
+              </a:ext>
+            </a:extLst>
+          </p:cNvPr>
+          <p:cNvSpPr txBox="1"/>
+          <p:nvPr/>
+        </p:nvSpPr>
+        <p:spPr>
+          <a:xfrm>
+            <a:off x="217714" y="255046"/>
+            <a:ext cx="11756571" cy="655436"/>
+          </a:xfrm>
+          <a:prstGeom prst="rect">
+            <a:avLst/>
+          </a:prstGeom>
+          <a:noFill/>
+        </p:spPr>
+        <p:txBody>
+          <a:bodyPr wrap="square">
+            <a:spAutoFit/>
+          </a:bodyPr>
+          <a:lstStyle/>
+          <a:p>
+            <a:pPr>
+              <a:lnSpc>
+                <a:spcPct val="150000"/>
+              </a:lnSpc>
+              <a:buNone/>
+            </a:pPr>
+            <a:r>
+              <a:rPr kumimoji="0" lang="az-Latn-AZ" altLang="en-US" sz="1300" b="0" i="0" u="none" strike="noStrike" cap="none" normalizeH="0" baseline="0">
+                <a:ln>
+                  <a:noFill/>
+                </a:ln>
+                <a:solidFill>
+                  <a:schemeClr val="tx1"/>
+                </a:solidFill>
+                <a:effectLst/>
+                <a:latin typeface="Arial" panose="020B0604020202020204" pitchFamily="34" charset="0"/>
+              </a:rPr>
+              <a:t>İlk öncə onu qeyd edi</a:t>
+            </a:r>
+            <a:r>
+              <a:rPr lang="az-Latn-AZ" altLang="en-US" sz="1300">
+                <a:latin typeface="Arial" panose="020B0604020202020204" pitchFamily="34" charset="0"/>
+              </a:rPr>
+              <a:t>m ki, </a:t>
+            </a:r>
+            <a:r>
+              <a:rPr lang="en-US" altLang="en-US" sz="1300" b="1">
+                <a:latin typeface="Arial" panose="020B0604020202020204" pitchFamily="34" charset="0"/>
+              </a:rPr>
+              <a:t>index.blade.php </a:t>
+            </a:r>
+            <a:r>
+              <a:rPr lang="az-Latn-AZ" altLang="en-US" sz="1300">
+                <a:latin typeface="Arial" panose="020B0604020202020204" pitchFamily="34" charset="0"/>
+              </a:rPr>
+              <a:t>faylında, </a:t>
+            </a:r>
+            <a:r>
+              <a:rPr lang="en-US" altLang="en-US" sz="1300" b="1">
+                <a:latin typeface="Arial" panose="020B0604020202020204" pitchFamily="34" charset="0"/>
+              </a:rPr>
+              <a:t>@foreach </a:t>
+            </a:r>
+            <a:r>
+              <a:rPr lang="az-Latn-AZ" altLang="en-US" sz="1300">
+                <a:latin typeface="Arial" panose="020B0604020202020204" pitchFamily="34" charset="0"/>
+              </a:rPr>
+              <a:t>direktivini </a:t>
+            </a:r>
+            <a:r>
+              <a:rPr lang="en-US" altLang="en-US" sz="1300" b="1">
+                <a:latin typeface="Arial" panose="020B0604020202020204" pitchFamily="34" charset="0"/>
+              </a:rPr>
+              <a:t>&lt;tbody&gt; </a:t>
+            </a:r>
+            <a:r>
+              <a:rPr lang="az-Latn-AZ" altLang="en-US" sz="1300">
+                <a:latin typeface="Arial" panose="020B0604020202020204" pitchFamily="34" charset="0"/>
+              </a:rPr>
+              <a:t>tag-inin içində yazmaq lazımdır. Əvvəl isə, yanlışlıqla </a:t>
+            </a:r>
+            <a:r>
+              <a:rPr lang="en-US" altLang="en-US" sz="1300" b="1">
+                <a:latin typeface="Arial" panose="020B0604020202020204" pitchFamily="34" charset="0"/>
+              </a:rPr>
+              <a:t>&lt;tbody&gt; </a:t>
+            </a:r>
+            <a:r>
+              <a:rPr lang="az-Latn-AZ" altLang="en-US" sz="1300">
+                <a:latin typeface="Arial" panose="020B0604020202020204" pitchFamily="34" charset="0"/>
+              </a:rPr>
+              <a:t>-ni bu direktivin içində yazmışdım. Onu düzəltdikdən sonra, isə növbəti slayda keçə bilərik.....</a:t>
+            </a:r>
+          </a:p>
+        </p:txBody>
+      </p:sp>
+      <p:pic>
+        <p:nvPicPr>
+          <p:cNvPr id="4" name="Picture 3">
+            <a:extLst>
+              <a:ext uri="{FF2B5EF4-FFF2-40B4-BE49-F238E27FC236}">
+                <a16:creationId xmlns:a16="http://schemas.microsoft.com/office/drawing/2014/main" id="{1FD5E863-C1C6-1552-06B8-41C79064D94E}"/>
+              </a:ext>
+            </a:extLst>
+          </p:cNvPr>
+          <p:cNvPicPr>
+            <a:picLocks noChangeAspect="1"/>
+          </p:cNvPicPr>
+          <p:nvPr/>
+        </p:nvPicPr>
+        <p:blipFill>
+          <a:blip r:embed="rId2"/>
+          <a:stretch>
+            <a:fillRect/>
+          </a:stretch>
+        </p:blipFill>
+        <p:spPr>
+          <a:xfrm>
+            <a:off x="2537926" y="1716716"/>
+            <a:ext cx="9654073" cy="5141283"/>
+          </a:xfrm>
+          <a:prstGeom prst="rect">
+            <a:avLst/>
+          </a:prstGeom>
+        </p:spPr>
+      </p:pic>
+    </p:spTree>
+    <p:extLst>
+      <p:ext uri="{BB962C8B-B14F-4D97-AF65-F5344CB8AC3E}">
+        <p14:creationId xmlns:p14="http://schemas.microsoft.com/office/powerpoint/2010/main" val="2398322736"/>
+      </p:ext>
+    </p:extLst>
+  </p:cSld>
+  <p:clrMapOvr>
+    <a:masterClrMapping/>
+  </p:clrMapOvr>
+</p:sld>
+</file>
+
+<file path=ppt/slides/slide7.xml><?xml version="1.0" encoding="utf-8"?>
+<p:sld xmlns:a="http://schemas.openxmlformats.org/drawingml/2006/main" xmlns:r="http://schemas.openxmlformats.org/officeDocument/2006/relationships" xmlns:p="http://schemas.openxmlformats.org/presentationml/2006/main">
+  <p:cSld>
+    <p:spTree>
+      <p:nvGrpSpPr>
+        <p:cNvPr id="1" name="">
+          <a:extLst>
+            <a:ext uri="{FF2B5EF4-FFF2-40B4-BE49-F238E27FC236}">
+              <a16:creationId xmlns:a16="http://schemas.microsoft.com/office/drawing/2014/main" id="{BC598EEB-1324-5BBD-CCCC-DC842B02C9A9}"/>
+            </a:ext>
+          </a:extLst>
+        </p:cNvPr>
+        <p:cNvGrpSpPr/>
+        <p:nvPr/>
+      </p:nvGrpSpPr>
+      <p:grpSpPr>
+        <a:xfrm>
+          <a:off x="0" y="0"/>
+          <a:ext cx="0" cy="0"/>
+          <a:chOff x="0" y="0"/>
+          <a:chExt cx="0" cy="0"/>
+        </a:xfrm>
+      </p:grpSpPr>
+      <p:sp>
+        <p:nvSpPr>
+          <p:cNvPr id="3" name="TextBox 2">
+            <a:extLst>
+              <a:ext uri="{FF2B5EF4-FFF2-40B4-BE49-F238E27FC236}">
+                <a16:creationId xmlns:a16="http://schemas.microsoft.com/office/drawing/2014/main" id="{63E1A141-FEC4-DD5C-DC23-763E78DB9EA7}"/>
+              </a:ext>
+            </a:extLst>
+          </p:cNvPr>
+          <p:cNvSpPr txBox="1"/>
+          <p:nvPr/>
+        </p:nvSpPr>
+        <p:spPr>
+          <a:xfrm>
+            <a:off x="217714" y="255046"/>
+            <a:ext cx="11756571" cy="5156668"/>
+          </a:xfrm>
+          <a:prstGeom prst="rect">
+            <a:avLst/>
+          </a:prstGeom>
+          <a:noFill/>
+        </p:spPr>
+        <p:txBody>
+          <a:bodyPr wrap="square">
+            <a:spAutoFit/>
+          </a:bodyPr>
+          <a:lstStyle/>
+          <a:p>
+            <a:pPr marL="342900" indent="-342900">
+              <a:lnSpc>
+                <a:spcPct val="150000"/>
+              </a:lnSpc>
+              <a:buAutoNum type="arabicParenR"/>
+            </a:pPr>
+            <a:r>
+              <a:rPr kumimoji="0" lang="en-US" altLang="en-US" sz="1300" b="1" i="0" u="none" strike="noStrike" cap="none" normalizeH="0" baseline="0">
+                <a:ln>
+                  <a:noFill/>
+                </a:ln>
+                <a:solidFill>
+                  <a:schemeClr val="tx1"/>
+                </a:solidFill>
+                <a:effectLst/>
+                <a:latin typeface="Arial" panose="020B0604020202020204" pitchFamily="34" charset="0"/>
+              </a:rPr>
+              <a:t>Paginator::useBootstrap() </a:t>
+            </a:r>
+            <a:r>
               <a:rPr kumimoji="0" lang="en-US" altLang="en-US" sz="1300" b="0" i="0" u="none" strike="noStrike" cap="none" normalizeH="0" baseline="0">
                 <a:ln>
                   <a:noFill/>
@@ -3638,15 +4632,1114 @@
                 <a:effectLst/>
                 <a:latin typeface="Arial" panose="020B0604020202020204" pitchFamily="34" charset="0"/>
               </a:rPr>
-              <a:t>.</a:t>
-            </a:r>
-          </a:p>
-        </p:txBody>
-      </p:sp>
+              <a:t>nə üçündür?</a:t>
+            </a:r>
+            <a:endParaRPr kumimoji="0" lang="az-Latn-AZ" altLang="en-US" sz="1300" b="0" i="0" u="none" strike="noStrike" cap="none" normalizeH="0" baseline="0">
+              <a:ln>
+                <a:noFill/>
+              </a:ln>
+              <a:solidFill>
+                <a:schemeClr val="tx1"/>
+              </a:solidFill>
+              <a:effectLst/>
+              <a:latin typeface="Arial" panose="020B0604020202020204" pitchFamily="34" charset="0"/>
+            </a:endParaRPr>
+          </a:p>
+          <a:p>
+            <a:pPr marL="342900" indent="-342900">
+              <a:lnSpc>
+                <a:spcPct val="150000"/>
+              </a:lnSpc>
+              <a:buAutoNum type="arabicParenR"/>
+            </a:pPr>
+            <a:endParaRPr lang="az-Latn-AZ" altLang="en-US" sz="1300">
+              <a:latin typeface="Arial" panose="020B0604020202020204" pitchFamily="34" charset="0"/>
+            </a:endParaRPr>
+          </a:p>
+          <a:p>
+            <a:pPr marL="342900" indent="-342900">
+              <a:lnSpc>
+                <a:spcPct val="150000"/>
+              </a:lnSpc>
+              <a:buAutoNum type="arabicParenR"/>
+            </a:pPr>
+            <a:endParaRPr kumimoji="0" lang="az-Latn-AZ" altLang="en-US" sz="1300" b="0" i="0" u="none" strike="noStrike" cap="none" normalizeH="0" baseline="0">
+              <a:ln>
+                <a:noFill/>
+              </a:ln>
+              <a:solidFill>
+                <a:schemeClr val="tx1"/>
+              </a:solidFill>
+              <a:effectLst/>
+              <a:latin typeface="Arial" panose="020B0604020202020204" pitchFamily="34" charset="0"/>
+            </a:endParaRPr>
+          </a:p>
+          <a:p>
+            <a:pPr marL="342900" indent="-342900">
+              <a:lnSpc>
+                <a:spcPct val="150000"/>
+              </a:lnSpc>
+              <a:buAutoNum type="arabicParenR"/>
+            </a:pPr>
+            <a:endParaRPr lang="az-Latn-AZ" altLang="en-US" sz="1300">
+              <a:latin typeface="Arial" panose="020B0604020202020204" pitchFamily="34" charset="0"/>
+            </a:endParaRPr>
+          </a:p>
+          <a:p>
+            <a:pPr marL="342900" indent="-342900">
+              <a:lnSpc>
+                <a:spcPct val="150000"/>
+              </a:lnSpc>
+              <a:buAutoNum type="arabicParenR"/>
+            </a:pPr>
+            <a:endParaRPr kumimoji="0" lang="az-Latn-AZ" altLang="en-US" sz="1300" b="0" i="0" u="none" strike="noStrike" cap="none" normalizeH="0" baseline="0">
+              <a:ln>
+                <a:noFill/>
+              </a:ln>
+              <a:solidFill>
+                <a:schemeClr val="tx1"/>
+              </a:solidFill>
+              <a:effectLst/>
+              <a:latin typeface="Arial" panose="020B0604020202020204" pitchFamily="34" charset="0"/>
+            </a:endParaRPr>
+          </a:p>
+          <a:p>
+            <a:pPr marL="342900" indent="-342900">
+              <a:lnSpc>
+                <a:spcPct val="150000"/>
+              </a:lnSpc>
+              <a:buAutoNum type="arabicParenR"/>
+            </a:pPr>
+            <a:endParaRPr lang="az-Latn-AZ" altLang="en-US" sz="1300">
+              <a:latin typeface="Arial" panose="020B0604020202020204" pitchFamily="34" charset="0"/>
+            </a:endParaRPr>
+          </a:p>
+          <a:p>
+            <a:pPr marL="342900" indent="-342900">
+              <a:lnSpc>
+                <a:spcPct val="150000"/>
+              </a:lnSpc>
+              <a:buAutoNum type="arabicParenR"/>
+            </a:pPr>
+            <a:endParaRPr kumimoji="0" lang="az-Latn-AZ" altLang="en-US" sz="1300" b="0" i="0" u="none" strike="noStrike" cap="none" normalizeH="0" baseline="0">
+              <a:ln>
+                <a:noFill/>
+              </a:ln>
+              <a:solidFill>
+                <a:schemeClr val="tx1"/>
+              </a:solidFill>
+              <a:effectLst/>
+              <a:latin typeface="Arial" panose="020B0604020202020204" pitchFamily="34" charset="0"/>
+            </a:endParaRPr>
+          </a:p>
+          <a:p>
+            <a:pPr marL="342900" indent="-342900">
+              <a:lnSpc>
+                <a:spcPct val="150000"/>
+              </a:lnSpc>
+              <a:buAutoNum type="arabicParenR"/>
+            </a:pPr>
+            <a:endParaRPr lang="az-Latn-AZ" altLang="en-US" sz="1300">
+              <a:latin typeface="Arial" panose="020B0604020202020204" pitchFamily="34" charset="0"/>
+            </a:endParaRPr>
+          </a:p>
+          <a:p>
+            <a:pPr marL="342900" indent="-342900">
+              <a:lnSpc>
+                <a:spcPct val="150000"/>
+              </a:lnSpc>
+              <a:buAutoNum type="arabicParenR"/>
+            </a:pPr>
+            <a:endParaRPr kumimoji="0" lang="az-Latn-AZ" altLang="en-US" sz="1300" b="0" i="0" u="none" strike="noStrike" cap="none" normalizeH="0" baseline="0">
+              <a:ln>
+                <a:noFill/>
+              </a:ln>
+              <a:solidFill>
+                <a:schemeClr val="tx1"/>
+              </a:solidFill>
+              <a:effectLst/>
+              <a:latin typeface="Arial" panose="020B0604020202020204" pitchFamily="34" charset="0"/>
+            </a:endParaRPr>
+          </a:p>
+          <a:p>
+            <a:pPr marL="342900" indent="-342900">
+              <a:lnSpc>
+                <a:spcPct val="150000"/>
+              </a:lnSpc>
+              <a:buAutoNum type="arabicParenR"/>
+            </a:pPr>
+            <a:endParaRPr lang="az-Latn-AZ" altLang="en-US" sz="1300">
+              <a:latin typeface="Arial" panose="020B0604020202020204" pitchFamily="34" charset="0"/>
+            </a:endParaRPr>
+          </a:p>
+          <a:p>
+            <a:pPr>
+              <a:lnSpc>
+                <a:spcPct val="150000"/>
+              </a:lnSpc>
+            </a:pPr>
+            <a:r>
+              <a:rPr kumimoji="0" lang="en-US" altLang="en-US" sz="1300" b="0" i="0" u="none" strike="noStrike" cap="none" normalizeH="0" baseline="0">
+                <a:ln>
+                  <a:noFill/>
+                </a:ln>
+                <a:solidFill>
+                  <a:schemeClr val="tx1"/>
+                </a:solidFill>
+                <a:effectLst/>
+                <a:latin typeface="Arial" panose="020B0604020202020204" pitchFamily="34" charset="0"/>
+              </a:rPr>
+              <a:t>Laravel-də </a:t>
+            </a:r>
+            <a:r>
+              <a:rPr kumimoji="0" lang="en-US" altLang="en-US" sz="1300" b="1" i="0" u="none" strike="noStrike" cap="none" normalizeH="0" baseline="0">
+                <a:ln>
+                  <a:noFill/>
+                </a:ln>
+                <a:solidFill>
+                  <a:schemeClr val="tx1"/>
+                </a:solidFill>
+                <a:effectLst/>
+                <a:latin typeface="Arial" panose="020B0604020202020204" pitchFamily="34" charset="0"/>
+              </a:rPr>
+              <a:t>links()</a:t>
+            </a:r>
+            <a:r>
+              <a:rPr kumimoji="0" lang="en-US" altLang="en-US" sz="1300" b="0" i="0" u="none" strike="noStrike" cap="none" normalizeH="0" baseline="0">
+                <a:ln>
+                  <a:noFill/>
+                </a:ln>
+                <a:solidFill>
+                  <a:schemeClr val="tx1"/>
+                </a:solidFill>
+                <a:effectLst/>
+                <a:latin typeface="Arial" panose="020B0604020202020204" pitchFamily="34" charset="0"/>
+              </a:rPr>
+              <a:t> funksiyası ilə səhifələmə (</a:t>
+            </a:r>
+            <a:r>
+              <a:rPr kumimoji="0" lang="en-US" altLang="en-US" sz="1300" b="1" i="0" u="none" strike="noStrike" cap="none" normalizeH="0" baseline="0">
+                <a:ln>
+                  <a:noFill/>
+                </a:ln>
+                <a:solidFill>
+                  <a:schemeClr val="tx1"/>
+                </a:solidFill>
+                <a:effectLst/>
+                <a:latin typeface="Arial" panose="020B0604020202020204" pitchFamily="34" charset="0"/>
+              </a:rPr>
+              <a:t>pagination</a:t>
+            </a:r>
+            <a:r>
+              <a:rPr kumimoji="0" lang="en-US" altLang="en-US" sz="1300" b="0" i="0" u="none" strike="noStrike" cap="none" normalizeH="0" baseline="0">
+                <a:ln>
+                  <a:noFill/>
+                </a:ln>
+                <a:solidFill>
+                  <a:schemeClr val="tx1"/>
+                </a:solidFill>
+                <a:effectLst/>
+                <a:latin typeface="Arial" panose="020B0604020202020204" pitchFamily="34" charset="0"/>
+              </a:rPr>
+              <a:t>) linklərini yaratdıqda, standart olaraq </a:t>
+            </a:r>
+            <a:r>
+              <a:rPr kumimoji="0" lang="en-US" altLang="en-US" sz="1300" b="1" i="0" u="none" strike="noStrike" cap="none" normalizeH="0" baseline="0">
+                <a:ln>
+                  <a:noFill/>
+                </a:ln>
+                <a:solidFill>
+                  <a:schemeClr val="tx1"/>
+                </a:solidFill>
+                <a:effectLst/>
+                <a:latin typeface="Arial" panose="020B0604020202020204" pitchFamily="34" charset="0"/>
+              </a:rPr>
+              <a:t>Tailwind CSS </a:t>
+            </a:r>
+            <a:r>
+              <a:rPr kumimoji="0" lang="en-US" altLang="en-US" sz="1300" b="0" i="0" u="none" strike="noStrike" cap="none" normalizeH="0" baseline="0">
+                <a:ln>
+                  <a:noFill/>
+                </a:ln>
+                <a:solidFill>
+                  <a:schemeClr val="tx1"/>
+                </a:solidFill>
+                <a:effectLst/>
+                <a:latin typeface="Arial" panose="020B0604020202020204" pitchFamily="34" charset="0"/>
+              </a:rPr>
+              <a:t>istifadə olunur (Laravel 8-dən etibarən). Əgər sən </a:t>
+            </a:r>
+            <a:r>
+              <a:rPr kumimoji="0" lang="en-US" altLang="en-US" sz="1300" b="1" i="0" u="none" strike="noStrike" cap="none" normalizeH="0" baseline="0">
+                <a:ln>
+                  <a:noFill/>
+                </a:ln>
+                <a:solidFill>
+                  <a:schemeClr val="tx1"/>
+                </a:solidFill>
+                <a:effectLst/>
+                <a:latin typeface="Arial" panose="020B0604020202020204" pitchFamily="34" charset="0"/>
+              </a:rPr>
+              <a:t>Bootstrap</a:t>
+            </a:r>
+            <a:r>
+              <a:rPr kumimoji="0" lang="en-US" altLang="en-US" sz="1300" b="0" i="0" u="none" strike="noStrike" cap="none" normalizeH="0" baseline="0">
+                <a:ln>
+                  <a:noFill/>
+                </a:ln>
+                <a:solidFill>
+                  <a:schemeClr val="tx1"/>
+                </a:solidFill>
+                <a:effectLst/>
+                <a:latin typeface="Arial" panose="020B0604020202020204" pitchFamily="34" charset="0"/>
+              </a:rPr>
+              <a:t> istifadə edirsənsə, bu zaman </a:t>
+            </a:r>
+            <a:r>
+              <a:rPr kumimoji="0" lang="en-US" altLang="en-US" sz="1300" b="1" i="0" u="none" strike="noStrike" cap="none" normalizeH="0" baseline="0">
+                <a:ln>
+                  <a:noFill/>
+                </a:ln>
+                <a:solidFill>
+                  <a:schemeClr val="tx1"/>
+                </a:solidFill>
+                <a:effectLst/>
+                <a:latin typeface="Arial" panose="020B0604020202020204" pitchFamily="34" charset="0"/>
+              </a:rPr>
+              <a:t>paginator</a:t>
+            </a:r>
+            <a:r>
+              <a:rPr kumimoji="0" lang="en-US" altLang="en-US" sz="1300" b="0" i="0" u="none" strike="noStrike" cap="none" normalizeH="0" baseline="0">
+                <a:ln>
+                  <a:noFill/>
+                </a:ln>
+                <a:solidFill>
+                  <a:schemeClr val="tx1"/>
+                </a:solidFill>
+                <a:effectLst/>
+                <a:latin typeface="Arial" panose="020B0604020202020204" pitchFamily="34" charset="0"/>
+              </a:rPr>
+              <a:t> görünüşünü </a:t>
+            </a:r>
+            <a:r>
+              <a:rPr kumimoji="0" lang="en-US" altLang="en-US" sz="1300" b="1" i="0" u="none" strike="noStrike" cap="none" normalizeH="0" baseline="0">
+                <a:ln>
+                  <a:noFill/>
+                </a:ln>
+                <a:solidFill>
+                  <a:schemeClr val="tx1"/>
+                </a:solidFill>
+                <a:effectLst/>
+                <a:latin typeface="Arial" panose="020B0604020202020204" pitchFamily="34" charset="0"/>
+              </a:rPr>
+              <a:t>Bootstrap</a:t>
+            </a:r>
+            <a:r>
+              <a:rPr kumimoji="0" lang="en-US" altLang="en-US" sz="1300" b="0" i="0" u="none" strike="noStrike" cap="none" normalizeH="0" baseline="0">
+                <a:ln>
+                  <a:noFill/>
+                </a:ln>
+                <a:solidFill>
+                  <a:schemeClr val="tx1"/>
+                </a:solidFill>
+                <a:effectLst/>
+                <a:latin typeface="Arial" panose="020B0604020202020204" pitchFamily="34" charset="0"/>
+              </a:rPr>
+              <a:t>-ə uyğunlaşdırmalısan.</a:t>
+            </a:r>
+            <a:endParaRPr kumimoji="0" lang="az-Latn-AZ" altLang="en-US" sz="1300" b="0" i="0" u="none" strike="noStrike" cap="none" normalizeH="0" baseline="0">
+              <a:ln>
+                <a:noFill/>
+              </a:ln>
+              <a:solidFill>
+                <a:schemeClr val="tx1"/>
+              </a:solidFill>
+              <a:effectLst/>
+              <a:latin typeface="Arial" panose="020B0604020202020204" pitchFamily="34" charset="0"/>
+            </a:endParaRPr>
+          </a:p>
+          <a:p>
+            <a:pPr>
+              <a:lnSpc>
+                <a:spcPct val="150000"/>
+              </a:lnSpc>
+            </a:pPr>
+            <a:endParaRPr lang="az-Latn-AZ" altLang="en-US" sz="1300">
+              <a:latin typeface="Arial" panose="020B0604020202020204" pitchFamily="34" charset="0"/>
+            </a:endParaRPr>
+          </a:p>
+          <a:p>
+            <a:pPr>
+              <a:lnSpc>
+                <a:spcPct val="150000"/>
+              </a:lnSpc>
+            </a:pPr>
+            <a:r>
+              <a:rPr kumimoji="0" lang="az-Latn-AZ" altLang="en-US" sz="1300" b="0" i="0" u="none" strike="noStrike" cap="none" normalizeH="0" baseline="0">
+                <a:ln>
+                  <a:noFill/>
+                </a:ln>
+                <a:solidFill>
+                  <a:schemeClr val="tx1"/>
+                </a:solidFill>
+                <a:effectLst/>
+                <a:latin typeface="Arial" panose="020B0604020202020204" pitchFamily="34" charset="0"/>
+              </a:rPr>
+              <a:t>Yuxarıdakı </a:t>
+            </a:r>
+            <a:r>
+              <a:rPr kumimoji="0" lang="en-US" altLang="en-US" sz="1300" b="0" i="0" u="none" strike="noStrike" cap="none" normalizeH="0" baseline="0">
+                <a:ln>
+                  <a:noFill/>
+                </a:ln>
+                <a:solidFill>
+                  <a:schemeClr val="tx1"/>
+                </a:solidFill>
+                <a:effectLst/>
+                <a:latin typeface="Arial" panose="020B0604020202020204" pitchFamily="34" charset="0"/>
+              </a:rPr>
+              <a:t>sətri yazaraq</a:t>
+            </a:r>
+            <a:r>
+              <a:rPr kumimoji="0" lang="az-Latn-AZ" altLang="en-US" sz="1300" b="0" i="0" u="none" strike="noStrike" cap="none" normalizeH="0" baseline="0">
+                <a:ln>
+                  <a:noFill/>
+                </a:ln>
+                <a:solidFill>
+                  <a:schemeClr val="tx1"/>
+                </a:solidFill>
+                <a:effectLst/>
+                <a:latin typeface="Arial" panose="020B0604020202020204" pitchFamily="34" charset="0"/>
+              </a:rPr>
+              <a:t>, </a:t>
+            </a:r>
+            <a:r>
+              <a:rPr kumimoji="0" lang="en-US" altLang="en-US" sz="1300" b="0" i="0" u="none" strike="noStrike" cap="none" normalizeH="0" baseline="0">
+                <a:ln>
+                  <a:noFill/>
+                </a:ln>
+                <a:solidFill>
+                  <a:schemeClr val="tx1"/>
+                </a:solidFill>
+                <a:effectLst/>
+                <a:latin typeface="Arial" panose="020B0604020202020204" pitchFamily="34" charset="0"/>
+              </a:rPr>
+              <a:t>Laravel-in pagination komponenti </a:t>
+            </a:r>
+            <a:r>
+              <a:rPr kumimoji="0" lang="en-US" altLang="en-US" sz="1300" b="1" i="0" u="none" strike="noStrike" cap="none" normalizeH="0" baseline="0">
+                <a:ln>
+                  <a:noFill/>
+                </a:ln>
+                <a:solidFill>
+                  <a:schemeClr val="tx1"/>
+                </a:solidFill>
+                <a:effectLst/>
+                <a:latin typeface="Arial" panose="020B0604020202020204" pitchFamily="34" charset="0"/>
+              </a:rPr>
+              <a:t>Bootstrap 4/5 </a:t>
+            </a:r>
+            <a:r>
+              <a:rPr kumimoji="0" lang="en-US" altLang="en-US" sz="1300" b="0" i="0" u="none" strike="noStrike" cap="none" normalizeH="0" baseline="0">
+                <a:ln>
+                  <a:noFill/>
+                </a:ln>
+                <a:solidFill>
+                  <a:schemeClr val="tx1"/>
+                </a:solidFill>
+                <a:effectLst/>
+                <a:latin typeface="Arial" panose="020B0604020202020204" pitchFamily="34" charset="0"/>
+              </a:rPr>
+              <a:t>siniflərini istifadə edərək pagination linklərini qurur.</a:t>
+            </a:r>
+            <a:endParaRPr kumimoji="0" lang="az-Latn-AZ" altLang="en-US" sz="1300" b="0" i="0" u="none" strike="noStrike" cap="none" normalizeH="0" baseline="0">
+              <a:ln>
+                <a:noFill/>
+              </a:ln>
+              <a:solidFill>
+                <a:schemeClr val="tx1"/>
+              </a:solidFill>
+              <a:effectLst/>
+              <a:latin typeface="Arial" panose="020B0604020202020204" pitchFamily="34" charset="0"/>
+            </a:endParaRPr>
+          </a:p>
+          <a:p>
+            <a:pPr>
+              <a:lnSpc>
+                <a:spcPct val="150000"/>
+              </a:lnSpc>
+            </a:pPr>
+            <a:endParaRPr lang="az-Latn-AZ" altLang="en-US" sz="1300">
+              <a:latin typeface="Arial" panose="020B0604020202020204" pitchFamily="34" charset="0"/>
+            </a:endParaRPr>
+          </a:p>
+          <a:p>
+            <a:pPr>
+              <a:lnSpc>
+                <a:spcPct val="150000"/>
+              </a:lnSpc>
+            </a:pPr>
+            <a:endParaRPr kumimoji="0" lang="az-Latn-AZ" altLang="en-US" sz="1300" b="0" i="0" u="none" strike="noStrike" cap="none" normalizeH="0" baseline="0">
+              <a:ln>
+                <a:noFill/>
+              </a:ln>
+              <a:solidFill>
+                <a:schemeClr val="tx1"/>
+              </a:solidFill>
+              <a:effectLst/>
+              <a:latin typeface="Arial" panose="020B0604020202020204" pitchFamily="34" charset="0"/>
+            </a:endParaRPr>
+          </a:p>
+          <a:p>
+            <a:pPr>
+              <a:lnSpc>
+                <a:spcPct val="150000"/>
+              </a:lnSpc>
+            </a:pPr>
+            <a:r>
+              <a:rPr kumimoji="0" lang="en-US" altLang="en-US" sz="1300" b="0" i="0" u="none" strike="noStrike" cap="none" normalizeH="0" baseline="0">
+                <a:ln>
+                  <a:noFill/>
+                </a:ln>
+                <a:solidFill>
+                  <a:schemeClr val="tx1"/>
+                </a:solidFill>
+                <a:effectLst/>
+                <a:latin typeface="Arial" panose="020B0604020202020204" pitchFamily="34" charset="0"/>
+              </a:rPr>
+              <a:t>Bu sətir </a:t>
+            </a:r>
+            <a:r>
+              <a:rPr kumimoji="0" lang="en-US" altLang="en-US" sz="1300" b="1" i="0" u="none" strike="noStrike" cap="none" normalizeH="0" baseline="0">
+                <a:ln>
+                  <a:noFill/>
+                </a:ln>
+                <a:solidFill>
+                  <a:srgbClr val="FF0000"/>
+                </a:solidFill>
+                <a:effectLst/>
+                <a:latin typeface="Arial" panose="020B0604020202020204" pitchFamily="34" charset="0"/>
+              </a:rPr>
+              <a:t>AppServiceProvider</a:t>
+            </a:r>
+            <a:r>
+              <a:rPr kumimoji="0" lang="en-US" altLang="en-US" sz="1300" b="0" i="0" u="none" strike="noStrike" cap="none" normalizeH="0" baseline="0">
+                <a:ln>
+                  <a:noFill/>
+                </a:ln>
+                <a:solidFill>
+                  <a:schemeClr val="tx1"/>
+                </a:solidFill>
+                <a:effectLst/>
+                <a:latin typeface="Arial" panose="020B0604020202020204" pitchFamily="34" charset="0"/>
+              </a:rPr>
+              <a:t>-in </a:t>
+            </a:r>
+            <a:r>
+              <a:rPr kumimoji="0" lang="en-US" altLang="en-US" sz="1300" b="1" i="0" u="none" strike="noStrike" cap="none" normalizeH="0" baseline="0">
+                <a:ln>
+                  <a:noFill/>
+                </a:ln>
+                <a:solidFill>
+                  <a:schemeClr val="tx1"/>
+                </a:solidFill>
+                <a:effectLst/>
+                <a:latin typeface="Arial" panose="020B0604020202020204" pitchFamily="34" charset="0"/>
+              </a:rPr>
+              <a:t>boot() </a:t>
+            </a:r>
+            <a:r>
+              <a:rPr kumimoji="0" lang="en-US" altLang="en-US" sz="1300" b="0" i="0" u="none" strike="noStrike" cap="none" normalizeH="0" baseline="0">
+                <a:ln>
+                  <a:noFill/>
+                </a:ln>
+                <a:solidFill>
+                  <a:schemeClr val="tx1"/>
+                </a:solidFill>
+                <a:effectLst/>
+                <a:latin typeface="Arial" panose="020B0604020202020204" pitchFamily="34" charset="0"/>
+              </a:rPr>
+              <a:t>metodunda yazılır, çünki bu metod Laravel-in tətbiqi başladıqda işləyir və </a:t>
+            </a:r>
+            <a:r>
+              <a:rPr kumimoji="0" lang="en-US" altLang="en-US" sz="1300" b="1" i="0" u="none" strike="noStrike" cap="none" normalizeH="0" baseline="0">
+                <a:ln>
+                  <a:noFill/>
+                </a:ln>
+                <a:solidFill>
+                  <a:schemeClr val="tx1"/>
+                </a:solidFill>
+                <a:effectLst/>
+                <a:latin typeface="Arial" panose="020B0604020202020204" pitchFamily="34" charset="0"/>
+              </a:rPr>
+              <a:t>Paginator</a:t>
+            </a:r>
+            <a:r>
+              <a:rPr kumimoji="0" lang="en-US" altLang="en-US" sz="1300" b="0" i="0" u="none" strike="noStrike" cap="none" normalizeH="0" baseline="0">
+                <a:ln>
+                  <a:noFill/>
+                </a:ln>
+                <a:solidFill>
+                  <a:schemeClr val="tx1"/>
+                </a:solidFill>
+                <a:effectLst/>
+                <a:latin typeface="Arial" panose="020B0604020202020204" pitchFamily="34" charset="0"/>
+              </a:rPr>
+              <a:t> sinfinə stil təyin edilir.</a:t>
+            </a:r>
+          </a:p>
+        </p:txBody>
+      </p:sp>
+      <p:pic>
+        <p:nvPicPr>
+          <p:cNvPr id="4" name="Picture 3">
+            <a:extLst>
+              <a:ext uri="{FF2B5EF4-FFF2-40B4-BE49-F238E27FC236}">
+                <a16:creationId xmlns:a16="http://schemas.microsoft.com/office/drawing/2014/main" id="{E11FA826-97DA-9CAB-D88A-C2FB04513E9D}"/>
+              </a:ext>
+            </a:extLst>
+          </p:cNvPr>
+          <p:cNvPicPr>
+            <a:picLocks noChangeAspect="1"/>
+          </p:cNvPicPr>
+          <p:nvPr/>
+        </p:nvPicPr>
+        <p:blipFill>
+          <a:blip r:embed="rId2"/>
+          <a:stretch>
+            <a:fillRect/>
+          </a:stretch>
+        </p:blipFill>
+        <p:spPr>
+          <a:xfrm>
+            <a:off x="0" y="794508"/>
+            <a:ext cx="3829584" cy="2133898"/>
+          </a:xfrm>
+          <a:prstGeom prst="rect">
+            <a:avLst/>
+          </a:prstGeom>
+        </p:spPr>
+      </p:pic>
     </p:spTree>
     <p:extLst>
       <p:ext uri="{BB962C8B-B14F-4D97-AF65-F5344CB8AC3E}">
-        <p14:creationId xmlns:p14="http://schemas.microsoft.com/office/powerpoint/2010/main" val="3095838342"/>
+        <p14:creationId xmlns:p14="http://schemas.microsoft.com/office/powerpoint/2010/main" val="1626079747"/>
+      </p:ext>
+    </p:extLst>
+  </p:cSld>
+  <p:clrMapOvr>
+    <a:masterClrMapping/>
+  </p:clrMapOvr>
+</p:sld>
+</file>
+
+<file path=ppt/slides/slide8.xml><?xml version="1.0" encoding="utf-8"?>
+<p:sld xmlns:a="http://schemas.openxmlformats.org/drawingml/2006/main" xmlns:r="http://schemas.openxmlformats.org/officeDocument/2006/relationships" xmlns:p="http://schemas.openxmlformats.org/presentationml/2006/main">
+  <p:cSld>
+    <p:spTree>
+      <p:nvGrpSpPr>
+        <p:cNvPr id="1" name="">
+          <a:extLst>
+            <a:ext uri="{FF2B5EF4-FFF2-40B4-BE49-F238E27FC236}">
+              <a16:creationId xmlns:a16="http://schemas.microsoft.com/office/drawing/2014/main" id="{B4740EC1-984B-29D0-6B22-C695A3A6008B}"/>
+            </a:ext>
+          </a:extLst>
+        </p:cNvPr>
+        <p:cNvGrpSpPr/>
+        <p:nvPr/>
+      </p:nvGrpSpPr>
+      <p:grpSpPr>
+        <a:xfrm>
+          <a:off x="0" y="0"/>
+          <a:ext cx="0" cy="0"/>
+          <a:chOff x="0" y="0"/>
+          <a:chExt cx="0" cy="0"/>
+        </a:xfrm>
+      </p:grpSpPr>
+      <p:sp>
+        <p:nvSpPr>
+          <p:cNvPr id="3" name="TextBox 2">
+            <a:extLst>
+              <a:ext uri="{FF2B5EF4-FFF2-40B4-BE49-F238E27FC236}">
+                <a16:creationId xmlns:a16="http://schemas.microsoft.com/office/drawing/2014/main" id="{265C425F-022F-6337-785F-D3E18B7B07D3}"/>
+              </a:ext>
+            </a:extLst>
+          </p:cNvPr>
+          <p:cNvSpPr txBox="1"/>
+          <p:nvPr/>
+        </p:nvSpPr>
+        <p:spPr>
+          <a:xfrm>
+            <a:off x="217714" y="255046"/>
+            <a:ext cx="11756571" cy="3356175"/>
+          </a:xfrm>
+          <a:prstGeom prst="rect">
+            <a:avLst/>
+          </a:prstGeom>
+          <a:noFill/>
+        </p:spPr>
+        <p:txBody>
+          <a:bodyPr wrap="square">
+            <a:spAutoFit/>
+          </a:bodyPr>
+          <a:lstStyle/>
+          <a:p>
+            <a:pPr>
+              <a:lnSpc>
+                <a:spcPct val="150000"/>
+              </a:lnSpc>
+              <a:buNone/>
+            </a:pPr>
+            <a:r>
+              <a:rPr kumimoji="0" lang="en-US" altLang="en-US" sz="1300" b="0" i="0" u="none" strike="noStrike" cap="none" normalizeH="0" baseline="0">
+                <a:ln>
+                  <a:noFill/>
+                </a:ln>
+                <a:solidFill>
+                  <a:schemeClr val="tx1"/>
+                </a:solidFill>
+                <a:effectLst/>
+                <a:latin typeface="Arial" panose="020B0604020202020204" pitchFamily="34" charset="0"/>
+              </a:rPr>
+              <a:t>2) Bu kod:</a:t>
+            </a:r>
+            <a:endParaRPr kumimoji="0" lang="az-Latn-AZ" altLang="en-US" sz="1300" b="0" i="0" u="none" strike="noStrike" cap="none" normalizeH="0" baseline="0">
+              <a:ln>
+                <a:noFill/>
+              </a:ln>
+              <a:solidFill>
+                <a:schemeClr val="tx1"/>
+              </a:solidFill>
+              <a:effectLst/>
+              <a:latin typeface="Arial" panose="020B0604020202020204" pitchFamily="34" charset="0"/>
+            </a:endParaRPr>
+          </a:p>
+          <a:p>
+            <a:pPr>
+              <a:lnSpc>
+                <a:spcPct val="150000"/>
+              </a:lnSpc>
+              <a:buNone/>
+            </a:pPr>
+            <a:endParaRPr lang="az-Latn-AZ" altLang="en-US" sz="1300">
+              <a:latin typeface="Arial" panose="020B0604020202020204" pitchFamily="34" charset="0"/>
+            </a:endParaRPr>
+          </a:p>
+          <a:p>
+            <a:pPr>
+              <a:lnSpc>
+                <a:spcPct val="150000"/>
+              </a:lnSpc>
+              <a:buNone/>
+            </a:pPr>
+            <a:endParaRPr kumimoji="0" lang="az-Latn-AZ" altLang="en-US" sz="1300" b="0" i="0" u="none" strike="noStrike" cap="none" normalizeH="0" baseline="0">
+              <a:ln>
+                <a:noFill/>
+              </a:ln>
+              <a:solidFill>
+                <a:schemeClr val="tx1"/>
+              </a:solidFill>
+              <a:effectLst/>
+              <a:latin typeface="Arial" panose="020B0604020202020204" pitchFamily="34" charset="0"/>
+            </a:endParaRPr>
+          </a:p>
+          <a:p>
+            <a:pPr>
+              <a:lnSpc>
+                <a:spcPct val="150000"/>
+              </a:lnSpc>
+              <a:buNone/>
+            </a:pPr>
+            <a:endParaRPr kumimoji="0" lang="az-Latn-AZ" altLang="en-US" sz="1300" b="0" i="0" u="none" strike="noStrike" cap="none" normalizeH="0" baseline="0">
+              <a:ln>
+                <a:noFill/>
+              </a:ln>
+              <a:solidFill>
+                <a:schemeClr val="tx1"/>
+              </a:solidFill>
+              <a:effectLst/>
+              <a:latin typeface="Arial" panose="020B0604020202020204" pitchFamily="34" charset="0"/>
+            </a:endParaRPr>
+          </a:p>
+          <a:p>
+            <a:pPr marL="285750" indent="-285750">
+              <a:lnSpc>
+                <a:spcPct val="150000"/>
+              </a:lnSpc>
+              <a:buFont typeface="Arial" panose="020B0604020202020204" pitchFamily="34" charset="0"/>
+              <a:buChar char="•"/>
+            </a:pPr>
+            <a:r>
+              <a:rPr kumimoji="0" lang="en-US" altLang="en-US" sz="1300" b="1" i="0" u="none" strike="noStrike" cap="none" normalizeH="0" baseline="0">
+                <a:ln>
+                  <a:noFill/>
+                </a:ln>
+                <a:solidFill>
+                  <a:schemeClr val="tx1"/>
+                </a:solidFill>
+                <a:effectLst/>
+                <a:latin typeface="Arial" panose="020B0604020202020204" pitchFamily="34" charset="0"/>
+              </a:rPr>
+              <a:t>$posts </a:t>
+            </a:r>
+            <a:r>
+              <a:rPr kumimoji="0" lang="en-US" altLang="en-US" sz="1300" b="0" i="0" u="none" strike="noStrike" cap="none" normalizeH="0" baseline="0">
+                <a:ln>
+                  <a:noFill/>
+                </a:ln>
+                <a:solidFill>
+                  <a:schemeClr val="tx1"/>
+                </a:solidFill>
+                <a:effectLst/>
+                <a:latin typeface="Arial" panose="020B0604020202020204" pitchFamily="34" charset="0"/>
+              </a:rPr>
+              <a:t>adlı səhifələnmiş collection üçün səhifə linklərini (previous, next, 1, 2, 3...) yaradır.</a:t>
+            </a:r>
+          </a:p>
+          <a:p>
+            <a:pPr marL="285750" indent="-285750">
+              <a:lnSpc>
+                <a:spcPct val="150000"/>
+              </a:lnSpc>
+              <a:buFont typeface="Arial" panose="020B0604020202020204" pitchFamily="34" charset="0"/>
+              <a:buChar char="•"/>
+            </a:pPr>
+            <a:r>
+              <a:rPr kumimoji="0" lang="en-US" altLang="en-US" sz="1300" b="0" i="0" u="none" strike="noStrike" cap="none" normalizeH="0" baseline="0">
+                <a:ln>
+                  <a:noFill/>
+                </a:ln>
+                <a:solidFill>
+                  <a:schemeClr val="tx1"/>
+                </a:solidFill>
+                <a:effectLst/>
+                <a:latin typeface="Arial" panose="020B0604020202020204" pitchFamily="34" charset="0"/>
+              </a:rPr>
+              <a:t>Laravel avtomatik olaraq hansı stil (Tailwind, Bootstrap və s.) istifadə olunursa, ona uyğun HTML generasiya edir.</a:t>
+            </a:r>
+            <a:r>
+              <a:rPr kumimoji="0" lang="az-Latn-AZ" altLang="en-US" sz="1300" b="0" i="0" u="none" strike="noStrike" cap="none" normalizeH="0" baseline="0">
+                <a:ln>
+                  <a:noFill/>
+                </a:ln>
+                <a:solidFill>
+                  <a:schemeClr val="tx1"/>
+                </a:solidFill>
+                <a:effectLst/>
+                <a:latin typeface="Arial" panose="020B0604020202020204" pitchFamily="34" charset="0"/>
+              </a:rPr>
+              <a:t> Bizdə Bootstrap istifadə edilir. Çünki, özümüz </a:t>
+            </a:r>
+            <a:r>
+              <a:rPr kumimoji="0" lang="en-US" altLang="en-US" sz="1300" b="1" i="0" u="none" strike="noStrike" cap="none" normalizeH="0" baseline="0">
+                <a:ln>
+                  <a:noFill/>
+                </a:ln>
+                <a:solidFill>
+                  <a:srgbClr val="FF0000"/>
+                </a:solidFill>
+                <a:effectLst/>
+                <a:latin typeface="Arial" panose="020B0604020202020204" pitchFamily="34" charset="0"/>
+              </a:rPr>
+              <a:t>AppServiceProvider</a:t>
+            </a:r>
+            <a:r>
+              <a:rPr kumimoji="0" lang="en-US" altLang="en-US" sz="1300" b="0" i="0" u="none" strike="noStrike" cap="none" normalizeH="0" baseline="0">
+                <a:ln>
+                  <a:noFill/>
+                </a:ln>
+                <a:solidFill>
+                  <a:schemeClr val="tx1"/>
+                </a:solidFill>
+                <a:effectLst/>
+                <a:latin typeface="Arial" panose="020B0604020202020204" pitchFamily="34" charset="0"/>
+              </a:rPr>
+              <a:t>-in </a:t>
+            </a:r>
+            <a:r>
+              <a:rPr kumimoji="0" lang="en-US" altLang="en-US" sz="1300" b="1" i="0" u="none" strike="noStrike" cap="none" normalizeH="0" baseline="0">
+                <a:ln>
+                  <a:noFill/>
+                </a:ln>
+                <a:solidFill>
+                  <a:schemeClr val="tx1"/>
+                </a:solidFill>
+                <a:effectLst/>
+                <a:latin typeface="Arial" panose="020B0604020202020204" pitchFamily="34" charset="0"/>
+              </a:rPr>
+              <a:t>boot() </a:t>
+            </a:r>
+            <a:r>
+              <a:rPr kumimoji="0" lang="en-US" altLang="en-US" sz="1300" b="0" i="0" u="none" strike="noStrike" cap="none" normalizeH="0" baseline="0">
+                <a:ln>
+                  <a:noFill/>
+                </a:ln>
+                <a:solidFill>
+                  <a:schemeClr val="tx1"/>
+                </a:solidFill>
+                <a:effectLst/>
+                <a:latin typeface="Arial" panose="020B0604020202020204" pitchFamily="34" charset="0"/>
+              </a:rPr>
+              <a:t>metodunda </a:t>
+            </a:r>
+            <a:r>
+              <a:rPr kumimoji="0" lang="az-Latn-AZ" altLang="en-US" sz="1300" b="0" i="0" u="none" strike="noStrike" cap="none" normalizeH="0" baseline="0">
+                <a:ln>
+                  <a:noFill/>
+                </a:ln>
+                <a:solidFill>
+                  <a:schemeClr val="tx1"/>
+                </a:solidFill>
+                <a:effectLst/>
+                <a:latin typeface="Arial" panose="020B0604020202020204" pitchFamily="34" charset="0"/>
+              </a:rPr>
+              <a:t>bunu qeyd etmişik.</a:t>
+            </a:r>
+            <a:endParaRPr lang="az-Latn-AZ" altLang="en-US" sz="1300">
+              <a:latin typeface="Arial" panose="020B0604020202020204" pitchFamily="34" charset="0"/>
+            </a:endParaRPr>
+          </a:p>
+          <a:p>
+            <a:pPr>
+              <a:lnSpc>
+                <a:spcPct val="150000"/>
+              </a:lnSpc>
+              <a:buNone/>
+            </a:pPr>
+            <a:endParaRPr kumimoji="0" lang="az-Latn-AZ" altLang="en-US" sz="1300" b="0" i="0" u="none" strike="noStrike" cap="none" normalizeH="0" baseline="0">
+              <a:ln>
+                <a:noFill/>
+              </a:ln>
+              <a:solidFill>
+                <a:schemeClr val="tx1"/>
+              </a:solidFill>
+              <a:effectLst/>
+              <a:latin typeface="Arial" panose="020B0604020202020204" pitchFamily="34" charset="0"/>
+            </a:endParaRPr>
+          </a:p>
+          <a:p>
+            <a:pPr>
+              <a:lnSpc>
+                <a:spcPct val="150000"/>
+              </a:lnSpc>
+              <a:buNone/>
+            </a:pPr>
+            <a:endParaRPr lang="az-Latn-AZ" altLang="en-US" sz="1300">
+              <a:latin typeface="Arial" panose="020B0604020202020204" pitchFamily="34" charset="0"/>
+            </a:endParaRPr>
+          </a:p>
+          <a:p>
+            <a:pPr>
+              <a:lnSpc>
+                <a:spcPct val="150000"/>
+              </a:lnSpc>
+              <a:buNone/>
+            </a:pPr>
+            <a:endParaRPr kumimoji="0" lang="az-Latn-AZ" altLang="en-US" sz="1300" b="0" i="0" u="none" strike="noStrike" cap="none" normalizeH="0" baseline="0">
+              <a:ln>
+                <a:noFill/>
+              </a:ln>
+              <a:solidFill>
+                <a:schemeClr val="tx1"/>
+              </a:solidFill>
+              <a:effectLst/>
+              <a:latin typeface="Arial" panose="020B0604020202020204" pitchFamily="34" charset="0"/>
+            </a:endParaRPr>
+          </a:p>
+          <a:p>
+            <a:pPr>
+              <a:lnSpc>
+                <a:spcPct val="150000"/>
+              </a:lnSpc>
+              <a:buNone/>
+            </a:pPr>
+            <a:endParaRPr kumimoji="0" lang="en-US" altLang="en-US" sz="1300" b="0" i="0" u="none" strike="noStrike" cap="none" normalizeH="0" baseline="0">
+              <a:ln>
+                <a:noFill/>
+              </a:ln>
+              <a:solidFill>
+                <a:schemeClr val="tx1"/>
+              </a:solidFill>
+              <a:effectLst/>
+              <a:latin typeface="Arial" panose="020B0604020202020204" pitchFamily="34" charset="0"/>
+            </a:endParaRPr>
+          </a:p>
+        </p:txBody>
+      </p:sp>
+      <p:pic>
+        <p:nvPicPr>
+          <p:cNvPr id="4" name="Picture 3">
+            <a:extLst>
+              <a:ext uri="{FF2B5EF4-FFF2-40B4-BE49-F238E27FC236}">
+                <a16:creationId xmlns:a16="http://schemas.microsoft.com/office/drawing/2014/main" id="{A9C481B0-71D3-577A-9CF4-D8779F64BF7D}"/>
+              </a:ext>
+            </a:extLst>
+          </p:cNvPr>
+          <p:cNvPicPr>
+            <a:picLocks noChangeAspect="1"/>
+          </p:cNvPicPr>
+          <p:nvPr/>
+        </p:nvPicPr>
+        <p:blipFill>
+          <a:blip r:embed="rId2"/>
+          <a:stretch>
+            <a:fillRect/>
+          </a:stretch>
+        </p:blipFill>
+        <p:spPr>
+          <a:xfrm>
+            <a:off x="0" y="759532"/>
+            <a:ext cx="1924319" cy="543001"/>
+          </a:xfrm>
+          <a:prstGeom prst="rect">
+            <a:avLst/>
+          </a:prstGeom>
+        </p:spPr>
+      </p:pic>
+    </p:spTree>
+    <p:extLst>
+      <p:ext uri="{BB962C8B-B14F-4D97-AF65-F5344CB8AC3E}">
+        <p14:creationId xmlns:p14="http://schemas.microsoft.com/office/powerpoint/2010/main" val="476882725"/>
+      </p:ext>
+    </p:extLst>
+  </p:cSld>
+  <p:clrMapOvr>
+    <a:masterClrMapping/>
+  </p:clrMapOvr>
+</p:sld>
+</file>
+
+<file path=ppt/slides/slide9.xml><?xml version="1.0" encoding="utf-8"?>
+<p:sld xmlns:a="http://schemas.openxmlformats.org/drawingml/2006/main" xmlns:r="http://schemas.openxmlformats.org/officeDocument/2006/relationships" xmlns:p="http://schemas.openxmlformats.org/presentationml/2006/main">
+  <p:cSld>
+    <p:spTree>
+      <p:nvGrpSpPr>
+        <p:cNvPr id="1" name="">
+          <a:extLst>
+            <a:ext uri="{FF2B5EF4-FFF2-40B4-BE49-F238E27FC236}">
+              <a16:creationId xmlns:a16="http://schemas.microsoft.com/office/drawing/2014/main" id="{373608A5-5930-0B83-3381-F88137F9D937}"/>
+            </a:ext>
+          </a:extLst>
+        </p:cNvPr>
+        <p:cNvGrpSpPr/>
+        <p:nvPr/>
+      </p:nvGrpSpPr>
+      <p:grpSpPr>
+        <a:xfrm>
+          <a:off x="0" y="0"/>
+          <a:ext cx="0" cy="0"/>
+          <a:chOff x="0" y="0"/>
+          <a:chExt cx="0" cy="0"/>
+        </a:xfrm>
+      </p:grpSpPr>
+      <p:sp>
+        <p:nvSpPr>
+          <p:cNvPr id="3" name="TextBox 2">
+            <a:extLst>
+              <a:ext uri="{FF2B5EF4-FFF2-40B4-BE49-F238E27FC236}">
+                <a16:creationId xmlns:a16="http://schemas.microsoft.com/office/drawing/2014/main" id="{3A3C0424-468D-C551-FB14-0517543FFF52}"/>
+              </a:ext>
+            </a:extLst>
+          </p:cNvPr>
+          <p:cNvSpPr txBox="1"/>
+          <p:nvPr/>
+        </p:nvSpPr>
+        <p:spPr>
+          <a:xfrm>
+            <a:off x="217714" y="255046"/>
+            <a:ext cx="11756571" cy="655436"/>
+          </a:xfrm>
+          <a:prstGeom prst="rect">
+            <a:avLst/>
+          </a:prstGeom>
+          <a:noFill/>
+        </p:spPr>
+        <p:txBody>
+          <a:bodyPr wrap="square">
+            <a:spAutoFit/>
+          </a:bodyPr>
+          <a:lstStyle/>
+          <a:p>
+            <a:pPr>
+              <a:lnSpc>
+                <a:spcPct val="150000"/>
+              </a:lnSpc>
+              <a:buNone/>
+            </a:pPr>
+            <a:r>
+              <a:rPr lang="az-Latn-AZ" altLang="en-US" sz="1300">
+                <a:latin typeface="Arial" panose="020B0604020202020204" pitchFamily="34" charset="0"/>
+              </a:rPr>
+              <a:t>3) Əgər öz dizaynını istifadə etmək istəyirsənsə: </a:t>
+            </a:r>
+            <a:r>
+              <a:rPr lang="az-Latn-AZ" altLang="en-US" sz="1300" b="1" u="sng">
+                <a:solidFill>
+                  <a:srgbClr val="00B0F0"/>
+                </a:solidFill>
+                <a:latin typeface="Arial" panose="020B0604020202020204" pitchFamily="34" charset="0"/>
+              </a:rPr>
+              <a:t>resources/views/vendor/pagination/custom.blade.php</a:t>
+            </a:r>
+            <a:r>
+              <a:rPr lang="az-Latn-AZ" altLang="en-US" sz="1300" b="1">
+                <a:latin typeface="Arial" panose="020B0604020202020204" pitchFamily="34" charset="0"/>
+              </a:rPr>
+              <a:t> </a:t>
+            </a:r>
+            <a:r>
+              <a:rPr lang="az-Latn-AZ" altLang="en-US" sz="1300">
+                <a:latin typeface="Arial" panose="020B0604020202020204" pitchFamily="34" charset="0"/>
+              </a:rPr>
+              <a:t>faylını özün dizayn edə bilərsən. Biz bunu etmiyəcəyik indi... Ehtiyacımız yoxdur. </a:t>
+            </a:r>
+            <a:endParaRPr kumimoji="0" lang="en-US" altLang="en-US" sz="1300" b="0" i="0" u="none" strike="noStrike" cap="none" normalizeH="0" baseline="0">
+              <a:ln>
+                <a:noFill/>
+              </a:ln>
+              <a:solidFill>
+                <a:schemeClr val="tx1"/>
+              </a:solidFill>
+              <a:effectLst/>
+              <a:latin typeface="Arial" panose="020B0604020202020204" pitchFamily="34" charset="0"/>
+            </a:endParaRPr>
+          </a:p>
+        </p:txBody>
+      </p:sp>
+      <p:pic>
+        <p:nvPicPr>
+          <p:cNvPr id="4" name="Picture 3">
+            <a:extLst>
+              <a:ext uri="{FF2B5EF4-FFF2-40B4-BE49-F238E27FC236}">
+                <a16:creationId xmlns:a16="http://schemas.microsoft.com/office/drawing/2014/main" id="{CD22A829-E3BC-96DB-6B70-FF1DFD124185}"/>
+              </a:ext>
+            </a:extLst>
+          </p:cNvPr>
+          <p:cNvPicPr>
+            <a:picLocks noChangeAspect="1"/>
+          </p:cNvPicPr>
+          <p:nvPr/>
+        </p:nvPicPr>
+        <p:blipFill>
+          <a:blip r:embed="rId2"/>
+          <a:stretch>
+            <a:fillRect/>
+          </a:stretch>
+        </p:blipFill>
+        <p:spPr>
+          <a:xfrm>
+            <a:off x="0" y="1147241"/>
+            <a:ext cx="4077269" cy="495369"/>
+          </a:xfrm>
+          <a:prstGeom prst="rect">
+            <a:avLst/>
+          </a:prstGeom>
+        </p:spPr>
+      </p:pic>
+    </p:spTree>
+    <p:extLst>
+      <p:ext uri="{BB962C8B-B14F-4D97-AF65-F5344CB8AC3E}">
+        <p14:creationId xmlns:p14="http://schemas.microsoft.com/office/powerpoint/2010/main" val="2886255039"/>
       </p:ext>
     </p:extLst>
   </p:cSld>
